--- a/docs/slides/bath-monitor-intro.pptx
+++ b/docs/slides/bath-monitor-intro.pptx
@@ -4,21 +4,24 @@
   <p:sldMasterIdLst>
     <p:sldMasterId id="2147483648" r:id="rId1"/>
   </p:sldMasterIdLst>
+  <p:notesMasterIdLst>
+    <p:notesMasterId r:id="rId14"/>
+  </p:notesMasterIdLst>
   <p:sldIdLst>
-    <p:sldId id="256" r:id="rId7"/>
-    <p:sldId id="257" r:id="rId9"/>
-    <p:sldId id="258" r:id="rId10"/>
-    <p:sldId id="259" r:id="rId11"/>
-    <p:sldId id="260" r:id="rId12"/>
-    <p:sldId id="261" r:id="rId13"/>
-    <p:sldId id="262" r:id="rId14"/>
-    <p:sldId id="263" r:id="rId15"/>
-    <p:sldId id="264" r:id="rId16"/>
-    <p:sldId id="265" r:id="rId17"/>
-    <p:sldId id="266" r:id="rId18"/>
-    <p:sldId id="267" r:id="rId19"/>
+    <p:sldId id="256" r:id="rId2"/>
+    <p:sldId id="257" r:id="rId3"/>
+    <p:sldId id="258" r:id="rId4"/>
+    <p:sldId id="259" r:id="rId5"/>
+    <p:sldId id="260" r:id="rId6"/>
+    <p:sldId id="261" r:id="rId7"/>
+    <p:sldId id="262" r:id="rId8"/>
+    <p:sldId id="263" r:id="rId9"/>
+    <p:sldId id="264" r:id="rId10"/>
+    <p:sldId id="265" r:id="rId11"/>
+    <p:sldId id="266" r:id="rId12"/>
+    <p:sldId id="267" r:id="rId13"/>
   </p:sldIdLst>
-  <p:sldSz cx="12191695" cy="6858000" type="screen4x3"/>
+  <p:sldSz cx="12192000" cy="6858000"/>
   <p:notesSz cx="6858000" cy="9144000"/>
   <p:defaultTextStyle>
     <a:defPPr>
@@ -115,11 +118,27 @@
       </a:defRPr>
     </a:lvl9pPr>
   </p:defaultTextStyle>
+  <p:extLst>
+    <p:ext uri="{EFAFB233-063F-42B5-8137-9DF3F51BA10A}">
+      <p15:sldGuideLst xmlns:p15="http://schemas.microsoft.com/office/powerpoint/2012/main">
+        <p15:guide id="1" orient="horz" pos="2160">
+          <p15:clr>
+            <a:srgbClr val="A4A3A4"/>
+          </p15:clr>
+        </p15:guide>
+        <p15:guide id="2" pos="2880">
+          <p15:clr>
+            <a:srgbClr val="A4A3A4"/>
+          </p15:clr>
+        </p15:guide>
+      </p15:sldGuideLst>
+    </p:ext>
+  </p:extLst>
 </p:presentation>
 </file>
 
 <file path=ppt/notesMasters/notesMaster1.xml><?xml version="1.0" encoding="utf-8"?>
-<p:notesMaster xmlns:a="http://schemas.openxmlformats.org/drawingml/2006/main" xmlns:p="http://schemas.openxmlformats.org/presentationml/2006/main" xmlns:r="http://schemas.openxmlformats.org/officeDocument/2006/relationships">
+<p:notesMaster xmlns:a="http://schemas.openxmlformats.org/drawingml/2006/main" xmlns:r="http://schemas.openxmlformats.org/officeDocument/2006/relationships" xmlns:p="http://schemas.openxmlformats.org/presentationml/2006/main">
   <p:cSld>
     <p:bg>
       <p:bgRef idx="1001">
@@ -140,242 +159,17 @@
           <a:chExt cx="0" cy="0"/>
         </a:xfrm>
       </p:grpSpPr>
-      <p:sp>
-        <p:nvSpPr>
-          <p:cNvPr id="2" name="Header Placeholder 1"/>
-          <p:cNvSpPr>
-            <a:spLocks noGrp="1"/>
-          </p:cNvSpPr>
-          <p:nvPr>
-            <p:ph type="hdr" sz="quarter"/>
-          </p:nvPr>
-        </p:nvSpPr>
-        <p:spPr>
-          <a:xfrm>
-            <a:off x="0" y="0"/>
-            <a:ext cx="2971800" cy="457200"/>
-          </a:xfrm>
-          <a:prstGeom prst="rect">
-            <a:avLst/>
-          </a:prstGeom>
-        </p:spPr>
-        <p:txBody>
-          <a:bodyPr vert="horz" lIns="91440" tIns="45720" rIns="91440" bIns="45720" rtlCol="0"/>
-          <a:lstStyle>
-            <a:lvl1pPr algn="l">
-              <a:defRPr sz="1200"/>
-            </a:lvl1pPr>
-          </a:lstStyle>
-          <a:p>
-            <a:endParaRPr lang="en-US"/>
-          </a:p>
-        </p:txBody>
-      </p:sp>
-      <p:sp>
-        <p:nvSpPr>
-          <p:cNvPr id="3" name="Date Placeholder 2"/>
-          <p:cNvSpPr>
-            <a:spLocks noGrp="1"/>
-          </p:cNvSpPr>
-          <p:nvPr>
-            <p:ph type="dt" idx="1"/>
-          </p:nvPr>
-        </p:nvSpPr>
-        <p:spPr>
-          <a:xfrm>
-            <a:off x="3884613" y="0"/>
-            <a:ext cx="2971800" cy="457200"/>
-          </a:xfrm>
-          <a:prstGeom prst="rect">
-            <a:avLst/>
-          </a:prstGeom>
-        </p:spPr>
-        <p:txBody>
-          <a:bodyPr vert="horz" lIns="91440" tIns="45720" rIns="91440" bIns="45720" rtlCol="0"/>
-          <a:lstStyle>
-            <a:lvl1pPr algn="r">
-              <a:defRPr sz="1200"/>
-            </a:lvl1pPr>
-          </a:lstStyle>
-          <a:p>
-            <a:fld id="{0F89C1C7-3DCD-1040-A9CF-14679D8B5DDD}" type="datetimeFigureOut">
-              <a:rPr lang="en-US" smtClean="0"/>
-              <a:t>10/17/16</a:t>
-            </a:fld>
-            <a:endParaRPr lang="en-US"/>
-          </a:p>
-        </p:txBody>
-      </p:sp>
-      <p:sp>
-        <p:nvSpPr>
-          <p:cNvPr id="4" name="Slide Image Placeholder 3"/>
-          <p:cNvSpPr>
-            <a:spLocks noGrp="1" noRot="1" noChangeAspect="1"/>
-          </p:cNvSpPr>
-          <p:nvPr>
-            <p:ph type="sldImg" idx="2"/>
-          </p:nvPr>
-        </p:nvSpPr>
-        <p:spPr>
-          <a:xfrm>
-            <a:off x="1143000" y="685800"/>
-            <a:ext cx="4572000" cy="3429000"/>
-          </a:xfrm>
-          <a:prstGeom prst="rect">
-            <a:avLst/>
-          </a:prstGeom>
-          <a:noFill/>
-          <a:ln w="12700">
-            <a:solidFill>
-              <a:prstClr val="black"/>
-            </a:solidFill>
-          </a:ln>
-        </p:spPr>
-        <p:txBody>
-          <a:bodyPr vert="horz" lIns="91440" tIns="45720" rIns="91440" bIns="45720" rtlCol="0" anchor="ctr"/>
-          <a:lstStyle/>
-          <a:p>
-            <a:endParaRPr lang="en-US"/>
-          </a:p>
-        </p:txBody>
-      </p:sp>
-      <p:sp>
-        <p:nvSpPr>
-          <p:cNvPr id="5" name="Notes Placeholder 4"/>
-          <p:cNvSpPr>
-            <a:spLocks noGrp="1"/>
-          </p:cNvSpPr>
-          <p:nvPr>
-            <p:ph type="body" sz="quarter" idx="3"/>
-          </p:nvPr>
-        </p:nvSpPr>
-        <p:spPr>
-          <a:xfrm>
-            <a:off x="685800" y="4343400"/>
-            <a:ext cx="5486400" cy="4114800"/>
-          </a:xfrm>
-          <a:prstGeom prst="rect">
-            <a:avLst/>
-          </a:prstGeom>
-        </p:spPr>
-        <p:txBody>
-          <a:bodyPr vert="horz" lIns="91440" tIns="45720" rIns="91440" bIns="45720" rtlCol="0"/>
-          <a:lstStyle/>
-          <a:p>
-            <a:pPr lvl="0"/>
-            <a:r>
-              <a:rPr lang="en-US" smtClean="0"/>
-              <a:t>Click to edit Master text styles</a:t>
-            </a:r>
-          </a:p>
-          <a:p>
-            <a:pPr lvl="1"/>
-            <a:r>
-              <a:rPr lang="en-US" smtClean="0"/>
-              <a:t>Second level</a:t>
-            </a:r>
-          </a:p>
-          <a:p>
-            <a:pPr lvl="2"/>
-            <a:r>
-              <a:rPr lang="en-US" smtClean="0"/>
-              <a:t>Third level</a:t>
-            </a:r>
-          </a:p>
-          <a:p>
-            <a:pPr lvl="3"/>
-            <a:r>
-              <a:rPr lang="en-US" smtClean="0"/>
-              <a:t>Fourth level</a:t>
-            </a:r>
-          </a:p>
-          <a:p>
-            <a:pPr lvl="4"/>
-            <a:r>
-              <a:rPr lang="en-US" smtClean="0"/>
-              <a:t>Fifth level</a:t>
-            </a:r>
-            <a:endParaRPr lang="en-US"/>
-          </a:p>
-        </p:txBody>
-      </p:sp>
-      <p:sp>
-        <p:nvSpPr>
-          <p:cNvPr id="6" name="Footer Placeholder 5"/>
-          <p:cNvSpPr>
-            <a:spLocks noGrp="1"/>
-          </p:cNvSpPr>
-          <p:nvPr>
-            <p:ph type="ftr" sz="quarter" idx="4"/>
-          </p:nvPr>
-        </p:nvSpPr>
-        <p:spPr>
-          <a:xfrm>
-            <a:off x="0" y="8685213"/>
-            <a:ext cx="2971800" cy="457200"/>
-          </a:xfrm>
-          <a:prstGeom prst="rect">
-            <a:avLst/>
-          </a:prstGeom>
-        </p:spPr>
-        <p:txBody>
-          <a:bodyPr vert="horz" lIns="91440" tIns="45720" rIns="91440" bIns="45720" rtlCol="0" anchor="b"/>
-          <a:lstStyle>
-            <a:lvl1pPr algn="l">
-              <a:defRPr sz="1200"/>
-            </a:lvl1pPr>
-          </a:lstStyle>
-          <a:p>
-            <a:endParaRPr lang="en-US"/>
-          </a:p>
-        </p:txBody>
-      </p:sp>
-      <p:sp>
-        <p:nvSpPr>
-          <p:cNvPr id="7" name="Slide Number Placeholder 6"/>
-          <p:cNvSpPr>
-            <a:spLocks noGrp="1"/>
-          </p:cNvSpPr>
-          <p:nvPr>
-            <p:ph type="sldNum" sz="quarter" idx="5"/>
-          </p:nvPr>
-        </p:nvSpPr>
-        <p:spPr>
-          <a:xfrm>
-            <a:off x="3884613" y="8685213"/>
-            <a:ext cx="2971800" cy="457200"/>
-          </a:xfrm>
-          <a:prstGeom prst="rect">
-            <a:avLst/>
-          </a:prstGeom>
-        </p:spPr>
-        <p:txBody>
-          <a:bodyPr vert="horz" lIns="91440" tIns="45720" rIns="91440" bIns="45720" rtlCol="0" anchor="b"/>
-          <a:lstStyle>
-            <a:lvl1pPr algn="r">
-              <a:defRPr sz="1200"/>
-            </a:lvl1pPr>
-          </a:lstStyle>
-          <a:p>
-            <a:fld id="{BB5E49A5-4136-284D-997B-48E1D791AD67}" type="slidenum">
-              <a:rPr lang="en-US" smtClean="0"/>
-              <a:t>‹#›</a:t>
-            </a:fld>
-            <a:endParaRPr lang="en-US"/>
-          </a:p>
-        </p:txBody>
-      </p:sp>
     </p:spTree>
     <p:extLst>
       <p:ext uri="{BB962C8B-B14F-4D97-AF65-F5344CB8AC3E}">
-        <p14:creationId xmlns:p14="http://schemas.microsoft.com/office/powerpoint/2010/main" val="2623252185"/>
+        <p14:creationId xmlns:p14="http://schemas.microsoft.com/office/powerpoint/2010/main" val="2012362805"/>
       </p:ext>
     </p:extLst>
   </p:cSld>
   <p:clrMap bg1="lt1" tx1="dk1" bg2="lt2" tx2="dk2" accent1="accent1" accent2="accent2" accent3="accent3" accent4="accent4" accent5="accent5" accent6="accent6" hlink="hlink" folHlink="folHlink"/>
   <p:notesStyle>
-    <a:lvl1pPr marL="0" algn="l" defTabSz="457200" rtl="0" eaLnBrk="1" latinLnBrk="0" hangingPunct="1">
-      <a:defRPr sz="1200" kern="1200">
+    <a:lvl1pPr marL="0" algn="l" defTabSz="914400" rtl="0" eaLnBrk="1" latinLnBrk="0" hangingPunct="1">
+      <a:defRPr kumimoji="1" sz="1200" kern="1200">
         <a:solidFill>
           <a:schemeClr val="tx1"/>
         </a:solidFill>
@@ -384,8 +178,8 @@
         <a:cs typeface="+mn-cs"/>
       </a:defRPr>
     </a:lvl1pPr>
-    <a:lvl2pPr marL="457200" algn="l" defTabSz="457200" rtl="0" eaLnBrk="1" latinLnBrk="0" hangingPunct="1">
-      <a:defRPr sz="1200" kern="1200">
+    <a:lvl2pPr marL="457200" algn="l" defTabSz="914400" rtl="0" eaLnBrk="1" latinLnBrk="0" hangingPunct="1">
+      <a:defRPr kumimoji="1" sz="1200" kern="1200">
         <a:solidFill>
           <a:schemeClr val="tx1"/>
         </a:solidFill>
@@ -394,8 +188,8 @@
         <a:cs typeface="+mn-cs"/>
       </a:defRPr>
     </a:lvl2pPr>
-    <a:lvl3pPr marL="914400" algn="l" defTabSz="457200" rtl="0" eaLnBrk="1" latinLnBrk="0" hangingPunct="1">
-      <a:defRPr sz="1200" kern="1200">
+    <a:lvl3pPr marL="914400" algn="l" defTabSz="914400" rtl="0" eaLnBrk="1" latinLnBrk="0" hangingPunct="1">
+      <a:defRPr kumimoji="1" sz="1200" kern="1200">
         <a:solidFill>
           <a:schemeClr val="tx1"/>
         </a:solidFill>
@@ -404,8 +198,8 @@
         <a:cs typeface="+mn-cs"/>
       </a:defRPr>
     </a:lvl3pPr>
-    <a:lvl4pPr marL="1371600" algn="l" defTabSz="457200" rtl="0" eaLnBrk="1" latinLnBrk="0" hangingPunct="1">
-      <a:defRPr sz="1200" kern="1200">
+    <a:lvl4pPr marL="1371600" algn="l" defTabSz="914400" rtl="0" eaLnBrk="1" latinLnBrk="0" hangingPunct="1">
+      <a:defRPr kumimoji="1" sz="1200" kern="1200">
         <a:solidFill>
           <a:schemeClr val="tx1"/>
         </a:solidFill>
@@ -414,8 +208,8 @@
         <a:cs typeface="+mn-cs"/>
       </a:defRPr>
     </a:lvl4pPr>
-    <a:lvl5pPr marL="1828800" algn="l" defTabSz="457200" rtl="0" eaLnBrk="1" latinLnBrk="0" hangingPunct="1">
-      <a:defRPr sz="1200" kern="1200">
+    <a:lvl5pPr marL="1828800" algn="l" defTabSz="914400" rtl="0" eaLnBrk="1" latinLnBrk="0" hangingPunct="1">
+      <a:defRPr kumimoji="1" sz="1200" kern="1200">
         <a:solidFill>
           <a:schemeClr val="tx1"/>
         </a:solidFill>
@@ -424,8 +218,8 @@
         <a:cs typeface="+mn-cs"/>
       </a:defRPr>
     </a:lvl5pPr>
-    <a:lvl6pPr marL="2286000" algn="l" defTabSz="457200" rtl="0" eaLnBrk="1" latinLnBrk="0" hangingPunct="1">
-      <a:defRPr sz="1200" kern="1200">
+    <a:lvl6pPr marL="2286000" algn="l" defTabSz="914400" rtl="0" eaLnBrk="1" latinLnBrk="0" hangingPunct="1">
+      <a:defRPr kumimoji="1" sz="1200" kern="1200">
         <a:solidFill>
           <a:schemeClr val="tx1"/>
         </a:solidFill>
@@ -434,8 +228,8 @@
         <a:cs typeface="+mn-cs"/>
       </a:defRPr>
     </a:lvl6pPr>
-    <a:lvl7pPr marL="2743200" algn="l" defTabSz="457200" rtl="0" eaLnBrk="1" latinLnBrk="0" hangingPunct="1">
-      <a:defRPr sz="1200" kern="1200">
+    <a:lvl7pPr marL="2743200" algn="l" defTabSz="914400" rtl="0" eaLnBrk="1" latinLnBrk="0" hangingPunct="1">
+      <a:defRPr kumimoji="1" sz="1200" kern="1200">
         <a:solidFill>
           <a:schemeClr val="tx1"/>
         </a:solidFill>
@@ -444,8 +238,8 @@
         <a:cs typeface="+mn-cs"/>
       </a:defRPr>
     </a:lvl7pPr>
-    <a:lvl8pPr marL="3200400" algn="l" defTabSz="457200" rtl="0" eaLnBrk="1" latinLnBrk="0" hangingPunct="1">
-      <a:defRPr sz="1200" kern="1200">
+    <a:lvl8pPr marL="3200400" algn="l" defTabSz="914400" rtl="0" eaLnBrk="1" latinLnBrk="0" hangingPunct="1">
+      <a:defRPr kumimoji="1" sz="1200" kern="1200">
         <a:solidFill>
           <a:schemeClr val="tx1"/>
         </a:solidFill>
@@ -454,8 +248,8 @@
         <a:cs typeface="+mn-cs"/>
       </a:defRPr>
     </a:lvl8pPr>
-    <a:lvl9pPr marL="3657600" algn="l" defTabSz="457200" rtl="0" eaLnBrk="1" latinLnBrk="0" hangingPunct="1">
-      <a:defRPr sz="1200" kern="1200">
+    <a:lvl9pPr marL="3657600" algn="l" defTabSz="914400" rtl="0" eaLnBrk="1" latinLnBrk="0" hangingPunct="1">
+      <a:defRPr kumimoji="1" sz="1200" kern="1200">
         <a:solidFill>
           <a:schemeClr val="tx1"/>
         </a:solidFill>
@@ -469,7 +263,7 @@
 </file>
 
 <file path=ppt/notesSlides/notesSlide1.xml><?xml version="1.0" encoding="utf-8"?>
-<p:notes xmlns:a="http://schemas.openxmlformats.org/drawingml/2006/main" xmlns:p="http://schemas.openxmlformats.org/presentationml/2006/main" xmlns:r="http://schemas.openxmlformats.org/officeDocument/2006/relationships">
+<p:notes xmlns:a="http://schemas.openxmlformats.org/drawingml/2006/main" xmlns:r="http://schemas.openxmlformats.org/officeDocument/2006/relationships" xmlns:p="http://schemas.openxmlformats.org/presentationml/2006/main">
   <p:cSld>
     <p:spTree>
       <p:nvGrpSpPr>
@@ -489,7 +283,7 @@
         <p:nvSpPr>
           <p:cNvPr id="2" name="Slide Image Placeholder 1"/>
           <p:cNvSpPr>
-            <a:spLocks noGrp="1"/>
+            <a:spLocks noGrp="1" noRot="1" noChangeAspect="1"/>
           </p:cNvSpPr>
           <p:nvPr>
             <p:ph type="sldImg" idx="2"/>
@@ -504,7 +298,7 @@
             <a:spLocks noGrp="1"/>
           </p:cNvSpPr>
           <p:nvPr>
-            <p:ph type="body" idx="3" sz="quarter"/>
+            <p:ph type="body" sz="quarter" idx="3"/>
           </p:nvPr>
         </p:nvSpPr>
         <p:spPr/>
@@ -525,7 +319,7 @@
             <a:spLocks noGrp="1"/>
           </p:cNvSpPr>
           <p:nvPr>
-            <p:ph type="sldNum" idx="5" sz="quarter"/>
+            <p:ph type="sldNum" sz="quarter" idx="5"/>
           </p:nvPr>
         </p:nvSpPr>
         <p:spPr/>
@@ -539,7 +333,7 @@
 </file>
 
 <file path=ppt/notesSlides/notesSlide2.xml><?xml version="1.0" encoding="utf-8"?>
-<p:notes xmlns:a="http://schemas.openxmlformats.org/drawingml/2006/main" xmlns:p="http://schemas.openxmlformats.org/presentationml/2006/main" xmlns:r="http://schemas.openxmlformats.org/officeDocument/2006/relationships">
+<p:notes xmlns:a="http://schemas.openxmlformats.org/drawingml/2006/main" xmlns:r="http://schemas.openxmlformats.org/officeDocument/2006/relationships" xmlns:p="http://schemas.openxmlformats.org/presentationml/2006/main">
   <p:cSld>
     <p:spTree>
       <p:nvGrpSpPr>
@@ -559,7 +353,7 @@
         <p:nvSpPr>
           <p:cNvPr id="2" name="Slide Image Placeholder 1"/>
           <p:cNvSpPr>
-            <a:spLocks noGrp="1"/>
+            <a:spLocks noGrp="1" noRot="1" noChangeAspect="1"/>
           </p:cNvSpPr>
           <p:nvPr>
             <p:ph type="sldImg" idx="2"/>
@@ -574,7 +368,7 @@
             <a:spLocks noGrp="1"/>
           </p:cNvSpPr>
           <p:nvPr>
-            <p:ph type="body" idx="3" sz="quarter"/>
+            <p:ph type="body" sz="quarter" idx="3"/>
           </p:nvPr>
         </p:nvSpPr>
         <p:spPr/>
@@ -595,7 +389,7 @@
             <a:spLocks noGrp="1"/>
           </p:cNvSpPr>
           <p:nvPr>
-            <p:ph type="sldNum" idx="5" sz="quarter"/>
+            <p:ph type="sldNum" sz="quarter" idx="5"/>
           </p:nvPr>
         </p:nvSpPr>
         <p:spPr/>
@@ -609,7 +403,7 @@
 </file>
 
 <file path=ppt/notesSlides/notesSlide3.xml><?xml version="1.0" encoding="utf-8"?>
-<p:notes xmlns:a="http://schemas.openxmlformats.org/drawingml/2006/main" xmlns:p="http://schemas.openxmlformats.org/presentationml/2006/main" xmlns:r="http://schemas.openxmlformats.org/officeDocument/2006/relationships">
+<p:notes xmlns:a="http://schemas.openxmlformats.org/drawingml/2006/main" xmlns:r="http://schemas.openxmlformats.org/officeDocument/2006/relationships" xmlns:p="http://schemas.openxmlformats.org/presentationml/2006/main">
   <p:cSld>
     <p:spTree>
       <p:nvGrpSpPr>
@@ -629,7 +423,7 @@
         <p:nvSpPr>
           <p:cNvPr id="2" name="Slide Image Placeholder 1"/>
           <p:cNvSpPr>
-            <a:spLocks noGrp="1"/>
+            <a:spLocks noGrp="1" noRot="1" noChangeAspect="1"/>
           </p:cNvSpPr>
           <p:nvPr>
             <p:ph type="sldImg" idx="2"/>
@@ -644,7 +438,7 @@
             <a:spLocks noGrp="1"/>
           </p:cNvSpPr>
           <p:nvPr>
-            <p:ph type="body" idx="3" sz="quarter"/>
+            <p:ph type="body" sz="quarter" idx="3"/>
           </p:nvPr>
         </p:nvSpPr>
         <p:spPr/>
@@ -665,7 +459,7 @@
             <a:spLocks noGrp="1"/>
           </p:cNvSpPr>
           <p:nvPr>
-            <p:ph type="sldNum" idx="5" sz="quarter"/>
+            <p:ph type="sldNum" sz="quarter" idx="5"/>
           </p:nvPr>
         </p:nvSpPr>
         <p:spPr/>
@@ -679,7 +473,7 @@
 </file>
 
 <file path=ppt/notesSlides/notesSlide4.xml><?xml version="1.0" encoding="utf-8"?>
-<p:notes xmlns:a="http://schemas.openxmlformats.org/drawingml/2006/main" xmlns:p="http://schemas.openxmlformats.org/presentationml/2006/main" xmlns:r="http://schemas.openxmlformats.org/officeDocument/2006/relationships">
+<p:notes xmlns:a="http://schemas.openxmlformats.org/drawingml/2006/main" xmlns:r="http://schemas.openxmlformats.org/officeDocument/2006/relationships" xmlns:p="http://schemas.openxmlformats.org/presentationml/2006/main">
   <p:cSld>
     <p:spTree>
       <p:nvGrpSpPr>
@@ -699,7 +493,7 @@
         <p:nvSpPr>
           <p:cNvPr id="2" name="Slide Image Placeholder 1"/>
           <p:cNvSpPr>
-            <a:spLocks noGrp="1"/>
+            <a:spLocks noGrp="1" noRot="1" noChangeAspect="1"/>
           </p:cNvSpPr>
           <p:nvPr>
             <p:ph type="sldImg" idx="2"/>
@@ -714,7 +508,7 @@
             <a:spLocks noGrp="1"/>
           </p:cNvSpPr>
           <p:nvPr>
-            <p:ph type="body" idx="3" sz="quarter"/>
+            <p:ph type="body" sz="quarter" idx="3"/>
           </p:nvPr>
         </p:nvSpPr>
         <p:spPr/>
@@ -735,7 +529,7 @@
             <a:spLocks noGrp="1"/>
           </p:cNvSpPr>
           <p:nvPr>
-            <p:ph type="sldNum" idx="5" sz="quarter"/>
+            <p:ph type="sldNum" sz="quarter" idx="5"/>
           </p:nvPr>
         </p:nvSpPr>
         <p:spPr/>
@@ -749,7 +543,7 @@
 </file>
 
 <file path=ppt/notesSlides/notesSlide5.xml><?xml version="1.0" encoding="utf-8"?>
-<p:notes xmlns:a="http://schemas.openxmlformats.org/drawingml/2006/main" xmlns:p="http://schemas.openxmlformats.org/presentationml/2006/main" xmlns:r="http://schemas.openxmlformats.org/officeDocument/2006/relationships">
+<p:notes xmlns:a="http://schemas.openxmlformats.org/drawingml/2006/main" xmlns:r="http://schemas.openxmlformats.org/officeDocument/2006/relationships" xmlns:p="http://schemas.openxmlformats.org/presentationml/2006/main">
   <p:cSld>
     <p:spTree>
       <p:nvGrpSpPr>
@@ -769,7 +563,7 @@
         <p:nvSpPr>
           <p:cNvPr id="2" name="Slide Image Placeholder 1"/>
           <p:cNvSpPr>
-            <a:spLocks noGrp="1"/>
+            <a:spLocks noGrp="1" noRot="1" noChangeAspect="1"/>
           </p:cNvSpPr>
           <p:nvPr>
             <p:ph type="sldImg" idx="2"/>
@@ -784,7 +578,7 @@
             <a:spLocks noGrp="1"/>
           </p:cNvSpPr>
           <p:nvPr>
-            <p:ph type="body" idx="3" sz="quarter"/>
+            <p:ph type="body" sz="quarter" idx="3"/>
           </p:nvPr>
         </p:nvSpPr>
         <p:spPr/>
@@ -805,7 +599,7 @@
             <a:spLocks noGrp="1"/>
           </p:cNvSpPr>
           <p:nvPr>
-            <p:ph type="sldNum" idx="5" sz="quarter"/>
+            <p:ph type="sldNum" sz="quarter" idx="5"/>
           </p:nvPr>
         </p:nvSpPr>
         <p:spPr/>
@@ -856,10 +650,9 @@
           <a:lstStyle/>
           <a:p>
             <a:r>
-              <a:rPr lang="en-US" smtClean="0"/>
+              <a:rPr lang="en-US"/>
               <a:t>Click to edit Master title style</a:t>
             </a:r>
-            <a:endParaRPr lang="en-US"/>
           </a:p>
         </p:txBody>
       </p:sp>
@@ -975,10 +768,9 @@
           </a:lstStyle>
           <a:p>
             <a:r>
-              <a:rPr lang="en-US" smtClean="0"/>
+              <a:rPr lang="en-US"/>
               <a:t>Click to edit Master subtitle style</a:t>
             </a:r>
-            <a:endParaRPr lang="en-US"/>
           </a:p>
         </p:txBody>
       </p:sp>
@@ -999,7 +791,7 @@
           <a:p>
             <a:fld id="{5BCAD085-E8A6-8845-BD4E-CB4CCA059FC4}" type="datetimeFigureOut">
               <a:rPr lang="en-US" smtClean="0"/>
-              <a:t>1/27/13</a:t>
+              <a:t>9/27/26</a:t>
             </a:fld>
             <a:endParaRPr lang="en-US"/>
           </a:p>
@@ -1093,10 +885,9 @@
           <a:lstStyle/>
           <a:p>
             <a:r>
-              <a:rPr lang="en-US" smtClean="0"/>
+              <a:rPr lang="en-US"/>
               <a:t>Click to edit Master title style</a:t>
             </a:r>
-            <a:endParaRPr lang="en-US"/>
           </a:p>
         </p:txBody>
       </p:sp>
@@ -1117,38 +908,37 @@
           <a:p>
             <a:pPr lvl="0"/>
             <a:r>
-              <a:rPr lang="en-US" smtClean="0"/>
+              <a:rPr lang="en-US"/>
               <a:t>Click to edit Master text styles</a:t>
             </a:r>
           </a:p>
           <a:p>
             <a:pPr lvl="1"/>
             <a:r>
-              <a:rPr lang="en-US" smtClean="0"/>
+              <a:rPr lang="en-US"/>
               <a:t>Second level</a:t>
             </a:r>
           </a:p>
           <a:p>
             <a:pPr lvl="2"/>
             <a:r>
-              <a:rPr lang="en-US" smtClean="0"/>
+              <a:rPr lang="en-US"/>
               <a:t>Third level</a:t>
             </a:r>
           </a:p>
           <a:p>
             <a:pPr lvl="3"/>
             <a:r>
-              <a:rPr lang="en-US" smtClean="0"/>
+              <a:rPr lang="en-US"/>
               <a:t>Fourth level</a:t>
             </a:r>
           </a:p>
           <a:p>
             <a:pPr lvl="4"/>
             <a:r>
-              <a:rPr lang="en-US" smtClean="0"/>
+              <a:rPr lang="en-US"/>
               <a:t>Fifth level</a:t>
             </a:r>
-            <a:endParaRPr lang="en-US"/>
           </a:p>
         </p:txBody>
       </p:sp>
@@ -1169,7 +959,7 @@
           <a:p>
             <a:fld id="{5BCAD085-E8A6-8845-BD4E-CB4CCA059FC4}" type="datetimeFigureOut">
               <a:rPr lang="en-US" smtClean="0"/>
-              <a:t>1/27/13</a:t>
+              <a:t>9/27/26</a:t>
             </a:fld>
             <a:endParaRPr lang="en-US"/>
           </a:p>
@@ -1268,10 +1058,9 @@
           <a:lstStyle/>
           <a:p>
             <a:r>
-              <a:rPr lang="en-US" smtClean="0"/>
+              <a:rPr lang="en-US"/>
               <a:t>Click to edit Master title style</a:t>
             </a:r>
-            <a:endParaRPr lang="en-US"/>
           </a:p>
         </p:txBody>
       </p:sp>
@@ -1297,38 +1086,37 @@
           <a:p>
             <a:pPr lvl="0"/>
             <a:r>
-              <a:rPr lang="en-US" smtClean="0"/>
+              <a:rPr lang="en-US"/>
               <a:t>Click to edit Master text styles</a:t>
             </a:r>
           </a:p>
           <a:p>
             <a:pPr lvl="1"/>
             <a:r>
-              <a:rPr lang="en-US" smtClean="0"/>
+              <a:rPr lang="en-US"/>
               <a:t>Second level</a:t>
             </a:r>
           </a:p>
           <a:p>
             <a:pPr lvl="2"/>
             <a:r>
-              <a:rPr lang="en-US" smtClean="0"/>
+              <a:rPr lang="en-US"/>
               <a:t>Third level</a:t>
             </a:r>
           </a:p>
           <a:p>
             <a:pPr lvl="3"/>
             <a:r>
-              <a:rPr lang="en-US" smtClean="0"/>
+              <a:rPr lang="en-US"/>
               <a:t>Fourth level</a:t>
             </a:r>
           </a:p>
           <a:p>
             <a:pPr lvl="4"/>
             <a:r>
-              <a:rPr lang="en-US" smtClean="0"/>
+              <a:rPr lang="en-US"/>
               <a:t>Fifth level</a:t>
             </a:r>
-            <a:endParaRPr lang="en-US"/>
           </a:p>
         </p:txBody>
       </p:sp>
@@ -1349,7 +1137,7 @@
           <a:p>
             <a:fld id="{5BCAD085-E8A6-8845-BD4E-CB4CCA059FC4}" type="datetimeFigureOut">
               <a:rPr lang="en-US" smtClean="0"/>
-              <a:t>1/27/13</a:t>
+              <a:t>9/27/26</a:t>
             </a:fld>
             <a:endParaRPr lang="en-US"/>
           </a:p>
@@ -1443,10 +1231,9 @@
           <a:lstStyle/>
           <a:p>
             <a:r>
-              <a:rPr lang="en-US" smtClean="0"/>
+              <a:rPr lang="en-US"/>
               <a:t>Click to edit Master title style</a:t>
             </a:r>
-            <a:endParaRPr lang="en-US"/>
           </a:p>
         </p:txBody>
       </p:sp>
@@ -1467,38 +1254,37 @@
           <a:p>
             <a:pPr lvl="0"/>
             <a:r>
-              <a:rPr lang="en-US" smtClean="0"/>
+              <a:rPr lang="en-US"/>
               <a:t>Click to edit Master text styles</a:t>
             </a:r>
           </a:p>
           <a:p>
             <a:pPr lvl="1"/>
             <a:r>
-              <a:rPr lang="en-US" smtClean="0"/>
+              <a:rPr lang="en-US"/>
               <a:t>Second level</a:t>
             </a:r>
           </a:p>
           <a:p>
             <a:pPr lvl="2"/>
             <a:r>
-              <a:rPr lang="en-US" smtClean="0"/>
+              <a:rPr lang="en-US"/>
               <a:t>Third level</a:t>
             </a:r>
           </a:p>
           <a:p>
             <a:pPr lvl="3"/>
             <a:r>
-              <a:rPr lang="en-US" smtClean="0"/>
+              <a:rPr lang="en-US"/>
               <a:t>Fourth level</a:t>
             </a:r>
           </a:p>
           <a:p>
             <a:pPr lvl="4"/>
             <a:r>
-              <a:rPr lang="en-US" smtClean="0"/>
+              <a:rPr lang="en-US"/>
               <a:t>Fifth level</a:t>
             </a:r>
-            <a:endParaRPr lang="en-US"/>
           </a:p>
         </p:txBody>
       </p:sp>
@@ -1519,7 +1305,7 @@
           <a:p>
             <a:fld id="{5BCAD085-E8A6-8845-BD4E-CB4CCA059FC4}" type="datetimeFigureOut">
               <a:rPr lang="en-US" smtClean="0"/>
-              <a:t>1/27/13</a:t>
+              <a:t>9/27/26</a:t>
             </a:fld>
             <a:endParaRPr lang="en-US"/>
           </a:p>
@@ -1622,10 +1408,9 @@
           </a:lstStyle>
           <a:p>
             <a:r>
-              <a:rPr lang="en-US" smtClean="0"/>
+              <a:rPr lang="en-US"/>
               <a:t>Click to edit Master title style</a:t>
             </a:r>
-            <a:endParaRPr lang="en-US"/>
           </a:p>
         </p:txBody>
       </p:sp>
@@ -1742,7 +1527,7 @@
           <a:p>
             <a:pPr lvl="0"/>
             <a:r>
-              <a:rPr lang="en-US" smtClean="0"/>
+              <a:rPr lang="en-US"/>
               <a:t>Click to edit Master text styles</a:t>
             </a:r>
           </a:p>
@@ -1765,7 +1550,7 @@
           <a:p>
             <a:fld id="{5BCAD085-E8A6-8845-BD4E-CB4CCA059FC4}" type="datetimeFigureOut">
               <a:rPr lang="en-US" smtClean="0"/>
-              <a:t>1/27/13</a:t>
+              <a:t>9/27/26</a:t>
             </a:fld>
             <a:endParaRPr lang="en-US"/>
           </a:p>
@@ -1859,10 +1644,9 @@
           <a:lstStyle/>
           <a:p>
             <a:r>
-              <a:rPr lang="en-US" smtClean="0"/>
+              <a:rPr lang="en-US"/>
               <a:t>Click to edit Master title style</a:t>
             </a:r>
-            <a:endParaRPr lang="en-US"/>
           </a:p>
         </p:txBody>
       </p:sp>
@@ -1916,38 +1700,37 @@
           <a:p>
             <a:pPr lvl="0"/>
             <a:r>
-              <a:rPr lang="en-US" smtClean="0"/>
+              <a:rPr lang="en-US"/>
               <a:t>Click to edit Master text styles</a:t>
             </a:r>
           </a:p>
           <a:p>
             <a:pPr lvl="1"/>
             <a:r>
-              <a:rPr lang="en-US" smtClean="0"/>
+              <a:rPr lang="en-US"/>
               <a:t>Second level</a:t>
             </a:r>
           </a:p>
           <a:p>
             <a:pPr lvl="2"/>
             <a:r>
-              <a:rPr lang="en-US" smtClean="0"/>
+              <a:rPr lang="en-US"/>
               <a:t>Third level</a:t>
             </a:r>
           </a:p>
           <a:p>
             <a:pPr lvl="3"/>
             <a:r>
-              <a:rPr lang="en-US" smtClean="0"/>
+              <a:rPr lang="en-US"/>
               <a:t>Fourth level</a:t>
             </a:r>
           </a:p>
           <a:p>
             <a:pPr lvl="4"/>
             <a:r>
-              <a:rPr lang="en-US" smtClean="0"/>
+              <a:rPr lang="en-US"/>
               <a:t>Fifth level</a:t>
             </a:r>
-            <a:endParaRPr lang="en-US"/>
           </a:p>
         </p:txBody>
       </p:sp>
@@ -2001,38 +1784,37 @@
           <a:p>
             <a:pPr lvl="0"/>
             <a:r>
-              <a:rPr lang="en-US" smtClean="0"/>
+              <a:rPr lang="en-US"/>
               <a:t>Click to edit Master text styles</a:t>
             </a:r>
           </a:p>
           <a:p>
             <a:pPr lvl="1"/>
             <a:r>
-              <a:rPr lang="en-US" smtClean="0"/>
+              <a:rPr lang="en-US"/>
               <a:t>Second level</a:t>
             </a:r>
           </a:p>
           <a:p>
             <a:pPr lvl="2"/>
             <a:r>
-              <a:rPr lang="en-US" smtClean="0"/>
+              <a:rPr lang="en-US"/>
               <a:t>Third level</a:t>
             </a:r>
           </a:p>
           <a:p>
             <a:pPr lvl="3"/>
             <a:r>
-              <a:rPr lang="en-US" smtClean="0"/>
+              <a:rPr lang="en-US"/>
               <a:t>Fourth level</a:t>
             </a:r>
           </a:p>
           <a:p>
             <a:pPr lvl="4"/>
             <a:r>
-              <a:rPr lang="en-US" smtClean="0"/>
+              <a:rPr lang="en-US"/>
               <a:t>Fifth level</a:t>
             </a:r>
-            <a:endParaRPr lang="en-US"/>
           </a:p>
         </p:txBody>
       </p:sp>
@@ -2053,7 +1835,7 @@
           <a:p>
             <a:fld id="{5BCAD085-E8A6-8845-BD4E-CB4CCA059FC4}" type="datetimeFigureOut">
               <a:rPr lang="en-US" smtClean="0"/>
-              <a:t>1/27/13</a:t>
+              <a:t>9/27/26</a:t>
             </a:fld>
             <a:endParaRPr lang="en-US"/>
           </a:p>
@@ -2151,10 +1933,9 @@
           </a:lstStyle>
           <a:p>
             <a:r>
-              <a:rPr lang="en-US" smtClean="0"/>
+              <a:rPr lang="en-US"/>
               <a:t>Click to edit Master title style</a:t>
             </a:r>
-            <a:endParaRPr lang="en-US"/>
           </a:p>
         </p:txBody>
       </p:sp>
@@ -2217,7 +1998,7 @@
           <a:p>
             <a:pPr lvl="0"/>
             <a:r>
-              <a:rPr lang="en-US" smtClean="0"/>
+              <a:rPr lang="en-US"/>
               <a:t>Click to edit Master text styles</a:t>
             </a:r>
           </a:p>
@@ -2273,38 +2054,37 @@
           <a:p>
             <a:pPr lvl="0"/>
             <a:r>
-              <a:rPr lang="en-US" smtClean="0"/>
+              <a:rPr lang="en-US"/>
               <a:t>Click to edit Master text styles</a:t>
             </a:r>
           </a:p>
           <a:p>
             <a:pPr lvl="1"/>
             <a:r>
-              <a:rPr lang="en-US" smtClean="0"/>
+              <a:rPr lang="en-US"/>
               <a:t>Second level</a:t>
             </a:r>
           </a:p>
           <a:p>
             <a:pPr lvl="2"/>
             <a:r>
-              <a:rPr lang="en-US" smtClean="0"/>
+              <a:rPr lang="en-US"/>
               <a:t>Third level</a:t>
             </a:r>
           </a:p>
           <a:p>
             <a:pPr lvl="3"/>
             <a:r>
-              <a:rPr lang="en-US" smtClean="0"/>
+              <a:rPr lang="en-US"/>
               <a:t>Fourth level</a:t>
             </a:r>
           </a:p>
           <a:p>
             <a:pPr lvl="4"/>
             <a:r>
-              <a:rPr lang="en-US" smtClean="0"/>
+              <a:rPr lang="en-US"/>
               <a:t>Fifth level</a:t>
             </a:r>
-            <a:endParaRPr lang="en-US"/>
           </a:p>
         </p:txBody>
       </p:sp>
@@ -2367,7 +2147,7 @@
           <a:p>
             <a:pPr lvl="0"/>
             <a:r>
-              <a:rPr lang="en-US" smtClean="0"/>
+              <a:rPr lang="en-US"/>
               <a:t>Click to edit Master text styles</a:t>
             </a:r>
           </a:p>
@@ -2423,38 +2203,37 @@
           <a:p>
             <a:pPr lvl="0"/>
             <a:r>
-              <a:rPr lang="en-US" smtClean="0"/>
+              <a:rPr lang="en-US"/>
               <a:t>Click to edit Master text styles</a:t>
             </a:r>
           </a:p>
           <a:p>
             <a:pPr lvl="1"/>
             <a:r>
-              <a:rPr lang="en-US" smtClean="0"/>
+              <a:rPr lang="en-US"/>
               <a:t>Second level</a:t>
             </a:r>
           </a:p>
           <a:p>
             <a:pPr lvl="2"/>
             <a:r>
-              <a:rPr lang="en-US" smtClean="0"/>
+              <a:rPr lang="en-US"/>
               <a:t>Third level</a:t>
             </a:r>
           </a:p>
           <a:p>
             <a:pPr lvl="3"/>
             <a:r>
-              <a:rPr lang="en-US" smtClean="0"/>
+              <a:rPr lang="en-US"/>
               <a:t>Fourth level</a:t>
             </a:r>
           </a:p>
           <a:p>
             <a:pPr lvl="4"/>
             <a:r>
-              <a:rPr lang="en-US" smtClean="0"/>
+              <a:rPr lang="en-US"/>
               <a:t>Fifth level</a:t>
             </a:r>
-            <a:endParaRPr lang="en-US"/>
           </a:p>
         </p:txBody>
       </p:sp>
@@ -2475,7 +2254,7 @@
           <a:p>
             <a:fld id="{5BCAD085-E8A6-8845-BD4E-CB4CCA059FC4}" type="datetimeFigureOut">
               <a:rPr lang="en-US" smtClean="0"/>
-              <a:t>1/27/13</a:t>
+              <a:t>9/27/26</a:t>
             </a:fld>
             <a:endParaRPr lang="en-US"/>
           </a:p>
@@ -2569,10 +2348,9 @@
           <a:lstStyle/>
           <a:p>
             <a:r>
-              <a:rPr lang="en-US" smtClean="0"/>
+              <a:rPr lang="en-US"/>
               <a:t>Click to edit Master title style</a:t>
             </a:r>
-            <a:endParaRPr lang="en-US"/>
           </a:p>
         </p:txBody>
       </p:sp>
@@ -2593,7 +2371,7 @@
           <a:p>
             <a:fld id="{5BCAD085-E8A6-8845-BD4E-CB4CCA059FC4}" type="datetimeFigureOut">
               <a:rPr lang="en-US" smtClean="0"/>
-              <a:t>1/27/13</a:t>
+              <a:t>9/27/26</a:t>
             </a:fld>
             <a:endParaRPr lang="en-US"/>
           </a:p>
@@ -2688,7 +2466,7 @@
           <a:p>
             <a:fld id="{5BCAD085-E8A6-8845-BD4E-CB4CCA059FC4}" type="datetimeFigureOut">
               <a:rPr lang="en-US" smtClean="0"/>
-              <a:t>1/27/13</a:t>
+              <a:t>9/27/26</a:t>
             </a:fld>
             <a:endParaRPr lang="en-US"/>
           </a:p>
@@ -2791,10 +2569,9 @@
           </a:lstStyle>
           <a:p>
             <a:r>
-              <a:rPr lang="en-US" smtClean="0"/>
+              <a:rPr lang="en-US"/>
               <a:t>Click to edit Master title style</a:t>
             </a:r>
-            <a:endParaRPr lang="en-US"/>
           </a:p>
         </p:txBody>
       </p:sp>
@@ -2848,38 +2625,37 @@
           <a:p>
             <a:pPr lvl="0"/>
             <a:r>
-              <a:rPr lang="en-US" smtClean="0"/>
+              <a:rPr lang="en-US"/>
               <a:t>Click to edit Master text styles</a:t>
             </a:r>
           </a:p>
           <a:p>
             <a:pPr lvl="1"/>
             <a:r>
-              <a:rPr lang="en-US" smtClean="0"/>
+              <a:rPr lang="en-US"/>
               <a:t>Second level</a:t>
             </a:r>
           </a:p>
           <a:p>
             <a:pPr lvl="2"/>
             <a:r>
-              <a:rPr lang="en-US" smtClean="0"/>
+              <a:rPr lang="en-US"/>
               <a:t>Third level</a:t>
             </a:r>
           </a:p>
           <a:p>
             <a:pPr lvl="3"/>
             <a:r>
-              <a:rPr lang="en-US" smtClean="0"/>
+              <a:rPr lang="en-US"/>
               <a:t>Fourth level</a:t>
             </a:r>
           </a:p>
           <a:p>
             <a:pPr lvl="4"/>
             <a:r>
-              <a:rPr lang="en-US" smtClean="0"/>
+              <a:rPr lang="en-US"/>
               <a:t>Fifth level</a:t>
             </a:r>
-            <a:endParaRPr lang="en-US"/>
           </a:p>
         </p:txBody>
       </p:sp>
@@ -2942,7 +2718,7 @@
           <a:p>
             <a:pPr lvl="0"/>
             <a:r>
-              <a:rPr lang="en-US" smtClean="0"/>
+              <a:rPr lang="en-US"/>
               <a:t>Click to edit Master text styles</a:t>
             </a:r>
           </a:p>
@@ -2965,7 +2741,7 @@
           <a:p>
             <a:fld id="{5BCAD085-E8A6-8845-BD4E-CB4CCA059FC4}" type="datetimeFigureOut">
               <a:rPr lang="en-US" smtClean="0"/>
-              <a:t>1/27/13</a:t>
+              <a:t>9/27/26</a:t>
             </a:fld>
             <a:endParaRPr lang="en-US"/>
           </a:p>
@@ -3068,10 +2844,9 @@
           </a:lstStyle>
           <a:p>
             <a:r>
-              <a:rPr lang="en-US" smtClean="0"/>
+              <a:rPr lang="en-US"/>
               <a:t>Click to edit Master title style</a:t>
             </a:r>
-            <a:endParaRPr lang="en-US"/>
           </a:p>
         </p:txBody>
       </p:sp>
@@ -3195,7 +2970,7 @@
           <a:p>
             <a:pPr lvl="0"/>
             <a:r>
-              <a:rPr lang="en-US" smtClean="0"/>
+              <a:rPr lang="en-US"/>
               <a:t>Click to edit Master text styles</a:t>
             </a:r>
           </a:p>
@@ -3218,7 +2993,7 @@
           <a:p>
             <a:fld id="{5BCAD085-E8A6-8845-BD4E-CB4CCA059FC4}" type="datetimeFigureOut">
               <a:rPr lang="en-US" smtClean="0"/>
-              <a:t>1/27/13</a:t>
+              <a:t>9/27/26</a:t>
             </a:fld>
             <a:endParaRPr lang="en-US"/>
           </a:p>
@@ -3327,10 +3102,9 @@
           <a:lstStyle/>
           <a:p>
             <a:r>
-              <a:rPr lang="en-US" smtClean="0"/>
+              <a:rPr lang="en-US"/>
               <a:t>Click to edit Master title style</a:t>
             </a:r>
-            <a:endParaRPr lang="en-US"/>
           </a:p>
         </p:txBody>
       </p:sp>
@@ -3361,38 +3135,37 @@
           <a:p>
             <a:pPr lvl="0"/>
             <a:r>
-              <a:rPr lang="en-US" smtClean="0"/>
+              <a:rPr lang="en-US"/>
               <a:t>Click to edit Master text styles</a:t>
             </a:r>
           </a:p>
           <a:p>
             <a:pPr lvl="1"/>
             <a:r>
-              <a:rPr lang="en-US" smtClean="0"/>
+              <a:rPr lang="en-US"/>
               <a:t>Second level</a:t>
             </a:r>
           </a:p>
           <a:p>
             <a:pPr lvl="2"/>
             <a:r>
-              <a:rPr lang="en-US" smtClean="0"/>
+              <a:rPr lang="en-US"/>
               <a:t>Third level</a:t>
             </a:r>
           </a:p>
           <a:p>
             <a:pPr lvl="3"/>
             <a:r>
-              <a:rPr lang="en-US" smtClean="0"/>
+              <a:rPr lang="en-US"/>
               <a:t>Fourth level</a:t>
             </a:r>
           </a:p>
           <a:p>
             <a:pPr lvl="4"/>
             <a:r>
-              <a:rPr lang="en-US" smtClean="0"/>
+              <a:rPr lang="en-US"/>
               <a:t>Fifth level</a:t>
             </a:r>
-            <a:endParaRPr lang="en-US"/>
           </a:p>
         </p:txBody>
       </p:sp>
@@ -3431,7 +3204,7 @@
           <a:p>
             <a:fld id="{5BCAD085-E8A6-8845-BD4E-CB4CCA059FC4}" type="datetimeFigureOut">
               <a:rPr lang="en-US" smtClean="0"/>
-              <a:t>1/27/13</a:t>
+              <a:t>9/27/26</a:t>
             </a:fld>
             <a:endParaRPr lang="en-US"/>
           </a:p>
@@ -3790,7 +3563,7 @@
 </file>
 
 <file path=ppt/slides/slide1.xml><?xml version="1.0" encoding="utf-8"?>
-<p:sld xmlns:a="http://schemas.openxmlformats.org/drawingml/2006/main" xmlns:p="http://schemas.openxmlformats.org/presentationml/2006/main" xmlns:r="http://schemas.openxmlformats.org/officeDocument/2006/relationships">
+<p:sld xmlns:a="http://schemas.openxmlformats.org/drawingml/2006/main" xmlns:r="http://schemas.openxmlformats.org/officeDocument/2006/relationships" xmlns:p="http://schemas.openxmlformats.org/presentationml/2006/main">
   <p:cSld>
     <p:bg>
       <p:bgPr>
@@ -3806,7 +3579,14 @@
         <p:cNvGrpSpPr/>
         <p:nvPr/>
       </p:nvGrpSpPr>
-      <p:grpSpPr/>
+      <p:grpSpPr>
+        <a:xfrm>
+          <a:off x="0" y="0"/>
+          <a:ext cx="0" cy="0"/>
+          <a:chOff x="0" y="0"/>
+          <a:chExt cx="0" cy="0"/>
+        </a:xfrm>
+      </p:grpSpPr>
       <p:sp>
         <p:nvSpPr>
           <p:cNvPr id="2" name="Oval 1"/>
@@ -3846,7 +3626,9 @@
         <p:txBody>
           <a:bodyPr rtlCol="0" anchor="ctr"/>
           <a:lstStyle/>
-          <a:p/>
+          <a:p>
+            <a:endParaRPr/>
+          </a:p>
         </p:txBody>
       </p:sp>
       <p:sp>
@@ -3888,7 +3670,9 @@
         <p:txBody>
           <a:bodyPr rtlCol="0" anchor="ctr"/>
           <a:lstStyle/>
-          <a:p/>
+          <a:p>
+            <a:endParaRPr/>
+          </a:p>
         </p:txBody>
       </p:sp>
       <p:sp>
@@ -3930,7 +3714,9 @@
         <p:txBody>
           <a:bodyPr rtlCol="0" anchor="ctr"/>
           <a:lstStyle/>
-          <a:p/>
+          <a:p>
+            <a:endParaRPr/>
+          </a:p>
         </p:txBody>
       </p:sp>
       <p:sp>
@@ -3972,7 +3758,9 @@
         <p:txBody>
           <a:bodyPr rtlCol="0" anchor="ctr"/>
           <a:lstStyle/>
-          <a:p/>
+          <a:p>
+            <a:endParaRPr/>
+          </a:p>
         </p:txBody>
       </p:sp>
       <p:sp>
@@ -4014,7 +3802,9 @@
         <p:txBody>
           <a:bodyPr rtlCol="0" anchor="ctr"/>
           <a:lstStyle/>
-          <a:p/>
+          <a:p>
+            <a:endParaRPr/>
+          </a:p>
         </p:txBody>
       </p:sp>
       <p:sp>
@@ -4034,7 +3824,7 @@
           <a:noFill/>
         </p:spPr>
         <p:txBody>
-          <a:bodyPr wrap="square" anchor="t" lIns="0" rIns="0" tIns="0" bIns="0">
+          <a:bodyPr wrap="square" lIns="0" tIns="0" rIns="0" bIns="0" anchor="t">
             <a:spAutoFit/>
           </a:bodyPr>
           <a:lstStyle/>
@@ -4071,7 +3861,7 @@
           <a:noFill/>
         </p:spPr>
         <p:txBody>
-          <a:bodyPr wrap="square" anchor="t" lIns="0" rIns="0" tIns="0" bIns="0">
+          <a:bodyPr wrap="square" lIns="0" tIns="0" rIns="0" bIns="0" anchor="t">
             <a:spAutoFit/>
           </a:bodyPr>
           <a:lstStyle/>
@@ -4108,7 +3898,7 @@
           <a:noFill/>
         </p:spPr>
         <p:txBody>
-          <a:bodyPr wrap="square" anchor="t" lIns="0" rIns="0" tIns="0" bIns="0">
+          <a:bodyPr wrap="square" lIns="0" tIns="0" rIns="0" bIns="0" anchor="t">
             <a:spAutoFit/>
           </a:bodyPr>
           <a:lstStyle/>
@@ -4146,6 +3936,58 @@
                 <a:cs typeface="Hiragino Sans"/>
               </a:rPr>
               <a:t>2026年9月</a:t>
+            </a:r>
+          </a:p>
+        </p:txBody>
+      </p:sp>
+      <p:sp>
+        <p:nvSpPr>
+          <p:cNvPr id="10" name="テキスト ボックス 9">
+            <a:extLst>
+              <a:ext uri="{FF2B5EF4-FFF2-40B4-BE49-F238E27FC236}">
+                <a16:creationId xmlns:a16="http://schemas.microsoft.com/office/drawing/2014/main" id="{1D60B856-2119-CAAD-3560-5F3D82F9D390}"/>
+              </a:ext>
+            </a:extLst>
+          </p:cNvPr>
+          <p:cNvSpPr txBox="1"/>
+          <p:nvPr/>
+        </p:nvSpPr>
+        <p:spPr>
+          <a:xfrm>
+            <a:off x="7836195" y="5497033"/>
+            <a:ext cx="3502365" cy="461665"/>
+          </a:xfrm>
+          <a:prstGeom prst="rect">
+            <a:avLst/>
+          </a:prstGeom>
+          <a:noFill/>
+        </p:spPr>
+        <p:txBody>
+          <a:bodyPr wrap="square" rtlCol="0">
+            <a:spAutoFit/>
+          </a:bodyPr>
+          <a:lstStyle/>
+          <a:p>
+            <a:pPr algn="r"/>
+            <a:r>
+              <a:rPr kumimoji="1" lang="en-US" altLang="ja-JP" sz="2400">
+                <a:solidFill>
+                  <a:schemeClr val="bg1"/>
+                </a:solidFill>
+                <a:latin typeface="Tsukushi A Round Gothic Regular" panose="02020400000000000000" pitchFamily="18" charset="-128"/>
+                <a:ea typeface="Tsukushi A Round Gothic Regular" panose="02020400000000000000" pitchFamily="18" charset="-128"/>
+              </a:rPr>
+              <a:t> 2026/9/27 </a:t>
+            </a:r>
+            <a:r>
+              <a:rPr kumimoji="1" lang="ja-JP" altLang="en-US" sz="2400">
+                <a:solidFill>
+                  <a:schemeClr val="bg1"/>
+                </a:solidFill>
+                <a:latin typeface="Tsukushi A Round Gothic Regular" panose="02020400000000000000" pitchFamily="18" charset="-128"/>
+                <a:ea typeface="Tsukushi A Round Gothic Regular" panose="02020400000000000000" pitchFamily="18" charset="-128"/>
+              </a:rPr>
+              <a:t>長谷部雅彦</a:t>
             </a:r>
           </a:p>
         </p:txBody>
@@ -4159,7 +4001,7 @@
 </file>
 
 <file path=ppt/slides/slide10.xml><?xml version="1.0" encoding="utf-8"?>
-<p:sld xmlns:a="http://schemas.openxmlformats.org/drawingml/2006/main" xmlns:p="http://schemas.openxmlformats.org/presentationml/2006/main" xmlns:r="http://schemas.openxmlformats.org/officeDocument/2006/relationships">
+<p:sld xmlns:a="http://schemas.openxmlformats.org/drawingml/2006/main" xmlns:r="http://schemas.openxmlformats.org/officeDocument/2006/relationships" xmlns:p="http://schemas.openxmlformats.org/presentationml/2006/main">
   <p:cSld>
     <p:bg>
       <p:bgPr>
@@ -4175,7 +4017,14 @@
         <p:cNvGrpSpPr/>
         <p:nvPr/>
       </p:nvGrpSpPr>
-      <p:grpSpPr/>
+      <p:grpSpPr>
+        <a:xfrm>
+          <a:off x="0" y="0"/>
+          <a:ext cx="0" cy="0"/>
+          <a:chOff x="0" y="0"/>
+          <a:chExt cx="0" cy="0"/>
+        </a:xfrm>
+      </p:grpSpPr>
       <p:sp>
         <p:nvSpPr>
           <p:cNvPr id="2" name="TextBox 1"/>
@@ -4193,7 +4042,7 @@
           <a:noFill/>
         </p:spPr>
         <p:txBody>
-          <a:bodyPr wrap="square" anchor="t" lIns="0" rIns="0" tIns="0" bIns="0">
+          <a:bodyPr wrap="square" lIns="0" tIns="0" rIns="0" bIns="0" anchor="t">
             <a:spAutoFit/>
           </a:bodyPr>
           <a:lstStyle/>
@@ -4230,7 +4079,7 @@
           <a:noFill/>
         </p:spPr>
         <p:txBody>
-          <a:bodyPr wrap="square" anchor="t" lIns="0" rIns="0" tIns="0" bIns="0">
+          <a:bodyPr wrap="square" lIns="0" tIns="0" rIns="0" bIns="0" anchor="t">
             <a:spAutoFit/>
           </a:bodyPr>
           <a:lstStyle/>
@@ -4267,7 +4116,7 @@
           <a:noFill/>
         </p:spPr>
         <p:txBody>
-          <a:bodyPr wrap="square" anchor="t" lIns="0" rIns="0" tIns="0" bIns="0">
+          <a:bodyPr wrap="square" lIns="0" tIns="0" rIns="0" bIns="0" anchor="t">
             <a:spAutoFit/>
           </a:bodyPr>
           <a:lstStyle/>
@@ -4328,7 +4177,9 @@
         <p:txBody>
           <a:bodyPr rtlCol="0" anchor="ctr"/>
           <a:lstStyle/>
-          <a:p/>
+          <a:p>
+            <a:endParaRPr/>
+          </a:p>
         </p:txBody>
       </p:sp>
       <p:sp>
@@ -4368,7 +4219,7 @@
           </a:fontRef>
         </p:style>
         <p:txBody>
-          <a:bodyPr rtlCol="0" anchor="ctr" wrap="square" lIns="45720" rIns="45720"/>
+          <a:bodyPr wrap="square" lIns="45720" rIns="45720" rtlCol="0" anchor="ctr"/>
           <a:lstStyle/>
           <a:p>
             <a:pPr algn="ctr"/>
@@ -4403,7 +4254,7 @@
           <a:noFill/>
         </p:spPr>
         <p:txBody>
-          <a:bodyPr wrap="square" anchor="t" lIns="0" rIns="0" tIns="0" bIns="0">
+          <a:bodyPr wrap="square" lIns="0" tIns="0" rIns="0" bIns="0" anchor="t">
             <a:spAutoFit/>
           </a:bodyPr>
           <a:lstStyle/>
@@ -4440,7 +4291,7 @@
           <a:noFill/>
         </p:spPr>
         <p:txBody>
-          <a:bodyPr wrap="square" anchor="t" lIns="0" rIns="0" tIns="0" bIns="0">
+          <a:bodyPr wrap="square" lIns="0" tIns="0" rIns="0" bIns="0" anchor="t">
             <a:spAutoFit/>
           </a:bodyPr>
           <a:lstStyle/>
@@ -4505,7 +4356,9 @@
         <p:txBody>
           <a:bodyPr rtlCol="0" anchor="ctr"/>
           <a:lstStyle/>
-          <a:p/>
+          <a:p>
+            <a:endParaRPr/>
+          </a:p>
         </p:txBody>
       </p:sp>
       <p:sp>
@@ -4545,7 +4398,7 @@
           </a:fontRef>
         </p:style>
         <p:txBody>
-          <a:bodyPr rtlCol="0" anchor="ctr" wrap="square" lIns="45720" rIns="45720"/>
+          <a:bodyPr wrap="square" lIns="45720" rIns="45720" rtlCol="0" anchor="ctr"/>
           <a:lstStyle/>
           <a:p>
             <a:pPr algn="ctr"/>
@@ -4580,7 +4433,7 @@
           <a:noFill/>
         </p:spPr>
         <p:txBody>
-          <a:bodyPr wrap="square" anchor="t" lIns="0" rIns="0" tIns="0" bIns="0">
+          <a:bodyPr wrap="square" lIns="0" tIns="0" rIns="0" bIns="0" anchor="t">
             <a:spAutoFit/>
           </a:bodyPr>
           <a:lstStyle/>
@@ -4617,7 +4470,7 @@
           <a:noFill/>
         </p:spPr>
         <p:txBody>
-          <a:bodyPr wrap="square" anchor="t" lIns="0" rIns="0" tIns="0" bIns="0">
+          <a:bodyPr wrap="square" lIns="0" tIns="0" rIns="0" bIns="0" anchor="t">
             <a:spAutoFit/>
           </a:bodyPr>
           <a:lstStyle/>
@@ -4682,7 +4535,9 @@
         <p:txBody>
           <a:bodyPr rtlCol="0" anchor="ctr"/>
           <a:lstStyle/>
-          <a:p/>
+          <a:p>
+            <a:endParaRPr/>
+          </a:p>
         </p:txBody>
       </p:sp>
       <p:sp>
@@ -4722,7 +4577,7 @@
           </a:fontRef>
         </p:style>
         <p:txBody>
-          <a:bodyPr rtlCol="0" anchor="ctr" wrap="square" lIns="45720" rIns="45720"/>
+          <a:bodyPr wrap="square" lIns="45720" rIns="45720" rtlCol="0" anchor="ctr"/>
           <a:lstStyle/>
           <a:p>
             <a:pPr algn="ctr"/>
@@ -4757,7 +4612,7 @@
           <a:noFill/>
         </p:spPr>
         <p:txBody>
-          <a:bodyPr wrap="square" anchor="t" lIns="0" rIns="0" tIns="0" bIns="0">
+          <a:bodyPr wrap="square" lIns="0" tIns="0" rIns="0" bIns="0" anchor="t">
             <a:spAutoFit/>
           </a:bodyPr>
           <a:lstStyle/>
@@ -4794,7 +4649,7 @@
           <a:noFill/>
         </p:spPr>
         <p:txBody>
-          <a:bodyPr wrap="square" anchor="t" lIns="0" rIns="0" tIns="0" bIns="0">
+          <a:bodyPr wrap="square" lIns="0" tIns="0" rIns="0" bIns="0" anchor="t">
             <a:spAutoFit/>
           </a:bodyPr>
           <a:lstStyle/>
@@ -4859,7 +4714,9 @@
         <p:txBody>
           <a:bodyPr rtlCol="0" anchor="ctr"/>
           <a:lstStyle/>
-          <a:p/>
+          <a:p>
+            <a:endParaRPr/>
+          </a:p>
         </p:txBody>
       </p:sp>
       <p:sp>
@@ -4899,7 +4756,7 @@
           </a:fontRef>
         </p:style>
         <p:txBody>
-          <a:bodyPr rtlCol="0" anchor="ctr" wrap="square" lIns="45720" rIns="45720"/>
+          <a:bodyPr wrap="square" lIns="45720" rIns="45720" rtlCol="0" anchor="ctr"/>
           <a:lstStyle/>
           <a:p>
             <a:pPr algn="ctr"/>
@@ -4934,7 +4791,7 @@
           <a:noFill/>
         </p:spPr>
         <p:txBody>
-          <a:bodyPr wrap="square" anchor="t" lIns="0" rIns="0" tIns="0" bIns="0">
+          <a:bodyPr wrap="square" lIns="0" tIns="0" rIns="0" bIns="0" anchor="t">
             <a:spAutoFit/>
           </a:bodyPr>
           <a:lstStyle/>
@@ -4971,7 +4828,7 @@
           <a:noFill/>
         </p:spPr>
         <p:txBody>
-          <a:bodyPr wrap="square" anchor="t" lIns="0" rIns="0" tIns="0" bIns="0">
+          <a:bodyPr wrap="square" lIns="0" tIns="0" rIns="0" bIns="0" anchor="t">
             <a:spAutoFit/>
           </a:bodyPr>
           <a:lstStyle/>
@@ -5004,7 +4861,7 @@
 </file>
 
 <file path=ppt/slides/slide11.xml><?xml version="1.0" encoding="utf-8"?>
-<p:sld xmlns:a="http://schemas.openxmlformats.org/drawingml/2006/main" xmlns:p="http://schemas.openxmlformats.org/presentationml/2006/main" xmlns:r="http://schemas.openxmlformats.org/officeDocument/2006/relationships">
+<p:sld xmlns:a="http://schemas.openxmlformats.org/drawingml/2006/main" xmlns:r="http://schemas.openxmlformats.org/officeDocument/2006/relationships" xmlns:p="http://schemas.openxmlformats.org/presentationml/2006/main">
   <p:cSld>
     <p:bg>
       <p:bgPr>
@@ -5020,7 +4877,14 @@
         <p:cNvGrpSpPr/>
         <p:nvPr/>
       </p:nvGrpSpPr>
-      <p:grpSpPr/>
+      <p:grpSpPr>
+        <a:xfrm>
+          <a:off x="0" y="0"/>
+          <a:ext cx="0" cy="0"/>
+          <a:chOff x="0" y="0"/>
+          <a:chExt cx="0" cy="0"/>
+        </a:xfrm>
+      </p:grpSpPr>
       <p:sp>
         <p:nvSpPr>
           <p:cNvPr id="2" name="TextBox 1"/>
@@ -5038,7 +4902,7 @@
           <a:noFill/>
         </p:spPr>
         <p:txBody>
-          <a:bodyPr wrap="square" anchor="t" lIns="0" rIns="0" tIns="0" bIns="0">
+          <a:bodyPr wrap="square" lIns="0" tIns="0" rIns="0" bIns="0" anchor="t">
             <a:spAutoFit/>
           </a:bodyPr>
           <a:lstStyle/>
@@ -5075,7 +4939,7 @@
           <a:noFill/>
         </p:spPr>
         <p:txBody>
-          <a:bodyPr wrap="square" anchor="t" lIns="0" rIns="0" tIns="0" bIns="0">
+          <a:bodyPr wrap="square" lIns="0" tIns="0" rIns="0" bIns="0" anchor="t">
             <a:spAutoFit/>
           </a:bodyPr>
           <a:lstStyle/>
@@ -5112,7 +4976,7 @@
           <a:noFill/>
         </p:spPr>
         <p:txBody>
-          <a:bodyPr wrap="square" anchor="t" lIns="0" rIns="0" tIns="0" bIns="0">
+          <a:bodyPr wrap="square" lIns="0" tIns="0" rIns="0" bIns="0" anchor="t">
             <a:spAutoFit/>
           </a:bodyPr>
           <a:lstStyle/>
@@ -5173,7 +5037,9 @@
         <p:txBody>
           <a:bodyPr rtlCol="0" anchor="ctr"/>
           <a:lstStyle/>
-          <a:p/>
+          <a:p>
+            <a:endParaRPr/>
+          </a:p>
         </p:txBody>
       </p:sp>
       <p:sp>
@@ -5217,7 +5083,9 @@
         <p:txBody>
           <a:bodyPr rtlCol="0" anchor="ctr"/>
           <a:lstStyle/>
-          <a:p/>
+          <a:p>
+            <a:endParaRPr/>
+          </a:p>
         </p:txBody>
       </p:sp>
       <p:sp>
@@ -5237,7 +5105,7 @@
           <a:noFill/>
         </p:spPr>
         <p:txBody>
-          <a:bodyPr wrap="square" anchor="t" lIns="0" rIns="0" tIns="0" bIns="0">
+          <a:bodyPr wrap="square" lIns="0" tIns="0" rIns="0" bIns="0" anchor="t">
             <a:spAutoFit/>
           </a:bodyPr>
           <a:lstStyle/>
@@ -5274,7 +5142,7 @@
           <a:noFill/>
         </p:spPr>
         <p:txBody>
-          <a:bodyPr wrap="square" anchor="t" lIns="0" rIns="0" tIns="0" bIns="0">
+          <a:bodyPr wrap="square" lIns="0" tIns="0" rIns="0" bIns="0" anchor="t">
             <a:spAutoFit/>
           </a:bodyPr>
           <a:lstStyle/>
@@ -5311,12 +5179,12 @@
           <a:noFill/>
         </p:spPr>
         <p:txBody>
-          <a:bodyPr wrap="square" anchor="t" lIns="0" rIns="0" tIns="0" bIns="0">
+          <a:bodyPr wrap="square" lIns="0" tIns="0" rIns="0" bIns="0" anchor="t">
             <a:spAutoFit/>
           </a:bodyPr>
           <a:lstStyle/>
           <a:p>
-            <a:pPr algn="l" marL="228600" indent="-228600">
+            <a:pPr marL="228600" indent="-228600" algn="l">
               <a:spcAft>
                 <a:spcPts val="900"/>
               </a:spcAft>
@@ -5335,7 +5203,7 @@
             </a:r>
           </a:p>
           <a:p>
-            <a:pPr algn="l" marL="228600" indent="-228600">
+            <a:pPr marL="228600" indent="-228600" algn="l">
               <a:spcAft>
                 <a:spcPts val="900"/>
               </a:spcAft>
@@ -5354,7 +5222,7 @@
             </a:r>
           </a:p>
           <a:p>
-            <a:pPr algn="l" marL="228600" indent="-228600">
+            <a:pPr marL="228600" indent="-228600" algn="l">
               <a:spcAft>
                 <a:spcPts val="900"/>
               </a:spcAft>
@@ -5373,7 +5241,7 @@
             </a:r>
           </a:p>
           <a:p>
-            <a:pPr algn="l" marL="228600" indent="-228600">
+            <a:pPr marL="228600" indent="-228600" algn="l">
               <a:spcAft>
                 <a:spcPts val="900"/>
               </a:spcAft>
@@ -5392,7 +5260,7 @@
             </a:r>
           </a:p>
           <a:p>
-            <a:pPr algn="l" marL="228600" indent="-228600">
+            <a:pPr marL="228600" indent="-228600" algn="l">
               <a:spcAft>
                 <a:spcPts val="900"/>
               </a:spcAft>
@@ -5453,7 +5321,9 @@
         <p:txBody>
           <a:bodyPr rtlCol="0" anchor="ctr"/>
           <a:lstStyle/>
-          <a:p/>
+          <a:p>
+            <a:endParaRPr/>
+          </a:p>
         </p:txBody>
       </p:sp>
       <p:sp>
@@ -5497,7 +5367,9 @@
         <p:txBody>
           <a:bodyPr rtlCol="0" anchor="ctr"/>
           <a:lstStyle/>
-          <a:p/>
+          <a:p>
+            <a:endParaRPr/>
+          </a:p>
         </p:txBody>
       </p:sp>
       <p:sp>
@@ -5517,7 +5389,7 @@
           <a:noFill/>
         </p:spPr>
         <p:txBody>
-          <a:bodyPr wrap="square" anchor="t" lIns="0" rIns="0" tIns="0" bIns="0">
+          <a:bodyPr wrap="square" lIns="0" tIns="0" rIns="0" bIns="0" anchor="t">
             <a:spAutoFit/>
           </a:bodyPr>
           <a:lstStyle/>
@@ -5554,7 +5426,7 @@
           <a:noFill/>
         </p:spPr>
         <p:txBody>
-          <a:bodyPr wrap="square" anchor="t" lIns="0" rIns="0" tIns="0" bIns="0">
+          <a:bodyPr wrap="square" lIns="0" tIns="0" rIns="0" bIns="0" anchor="t">
             <a:spAutoFit/>
           </a:bodyPr>
           <a:lstStyle/>
@@ -5591,12 +5463,12 @@
           <a:noFill/>
         </p:spPr>
         <p:txBody>
-          <a:bodyPr wrap="square" anchor="t" lIns="0" rIns="0" tIns="0" bIns="0">
+          <a:bodyPr wrap="square" lIns="0" tIns="0" rIns="0" bIns="0" anchor="t">
             <a:spAutoFit/>
           </a:bodyPr>
           <a:lstStyle/>
           <a:p>
-            <a:pPr algn="l" marL="228600" indent="-228600">
+            <a:pPr marL="228600" indent="-228600" algn="l">
               <a:spcAft>
                 <a:spcPts val="900"/>
               </a:spcAft>
@@ -5615,7 +5487,7 @@
             </a:r>
           </a:p>
           <a:p>
-            <a:pPr algn="l" marL="228600" indent="-228600">
+            <a:pPr marL="228600" indent="-228600" algn="l">
               <a:spcAft>
                 <a:spcPts val="900"/>
               </a:spcAft>
@@ -5634,7 +5506,7 @@
             </a:r>
           </a:p>
           <a:p>
-            <a:pPr algn="l" marL="228600" indent="-228600">
+            <a:pPr marL="228600" indent="-228600" algn="l">
               <a:spcAft>
                 <a:spcPts val="900"/>
               </a:spcAft>
@@ -5653,7 +5525,7 @@
             </a:r>
           </a:p>
           <a:p>
-            <a:pPr algn="l" marL="228600" indent="-228600">
+            <a:pPr marL="228600" indent="-228600" algn="l">
               <a:spcAft>
                 <a:spcPts val="900"/>
               </a:spcAft>
@@ -5672,7 +5544,7 @@
             </a:r>
           </a:p>
           <a:p>
-            <a:pPr algn="l" marL="228600" indent="-228600">
+            <a:pPr marL="228600" indent="-228600" algn="l">
               <a:spcAft>
                 <a:spcPts val="900"/>
               </a:spcAft>
@@ -5733,7 +5605,9 @@
         <p:txBody>
           <a:bodyPr rtlCol="0" anchor="ctr"/>
           <a:lstStyle/>
-          <a:p/>
+          <a:p>
+            <a:endParaRPr/>
+          </a:p>
         </p:txBody>
       </p:sp>
       <p:sp>
@@ -5777,7 +5651,9 @@
         <p:txBody>
           <a:bodyPr rtlCol="0" anchor="ctr"/>
           <a:lstStyle/>
-          <a:p/>
+          <a:p>
+            <a:endParaRPr/>
+          </a:p>
         </p:txBody>
       </p:sp>
       <p:sp>
@@ -5797,7 +5673,7 @@
           <a:noFill/>
         </p:spPr>
         <p:txBody>
-          <a:bodyPr wrap="square" anchor="t" lIns="0" rIns="0" tIns="0" bIns="0">
+          <a:bodyPr wrap="square" lIns="0" tIns="0" rIns="0" bIns="0" anchor="t">
             <a:spAutoFit/>
           </a:bodyPr>
           <a:lstStyle/>
@@ -5834,7 +5710,7 @@
           <a:noFill/>
         </p:spPr>
         <p:txBody>
-          <a:bodyPr wrap="square" anchor="t" lIns="0" rIns="0" tIns="0" bIns="0">
+          <a:bodyPr wrap="square" lIns="0" tIns="0" rIns="0" bIns="0" anchor="t">
             <a:spAutoFit/>
           </a:bodyPr>
           <a:lstStyle/>
@@ -5871,12 +5747,12 @@
           <a:noFill/>
         </p:spPr>
         <p:txBody>
-          <a:bodyPr wrap="square" anchor="t" lIns="0" rIns="0" tIns="0" bIns="0">
+          <a:bodyPr wrap="square" lIns="0" tIns="0" rIns="0" bIns="0" anchor="t">
             <a:spAutoFit/>
           </a:bodyPr>
           <a:lstStyle/>
           <a:p>
-            <a:pPr algn="l" marL="228600" indent="-228600">
+            <a:pPr marL="228600" indent="-228600" algn="l">
               <a:spcAft>
                 <a:spcPts val="900"/>
               </a:spcAft>
@@ -5895,7 +5771,7 @@
             </a:r>
           </a:p>
           <a:p>
-            <a:pPr algn="l" marL="228600" indent="-228600">
+            <a:pPr marL="228600" indent="-228600" algn="l">
               <a:spcAft>
                 <a:spcPts val="900"/>
               </a:spcAft>
@@ -5914,7 +5790,7 @@
             </a:r>
           </a:p>
           <a:p>
-            <a:pPr algn="l" marL="228600" indent="-228600">
+            <a:pPr marL="228600" indent="-228600" algn="l">
               <a:spcAft>
                 <a:spcPts val="900"/>
               </a:spcAft>
@@ -5933,7 +5809,7 @@
             </a:r>
           </a:p>
           <a:p>
-            <a:pPr algn="l" marL="228600" indent="-228600">
+            <a:pPr marL="228600" indent="-228600" algn="l">
               <a:spcAft>
                 <a:spcPts val="900"/>
               </a:spcAft>
@@ -5952,7 +5828,7 @@
             </a:r>
           </a:p>
           <a:p>
-            <a:pPr algn="l" marL="228600" indent="-228600">
+            <a:pPr marL="228600" indent="-228600" algn="l">
               <a:spcAft>
                 <a:spcPts val="900"/>
               </a:spcAft>
@@ -5981,7 +5857,7 @@
 </file>
 
 <file path=ppt/slides/slide12.xml><?xml version="1.0" encoding="utf-8"?>
-<p:sld xmlns:a="http://schemas.openxmlformats.org/drawingml/2006/main" xmlns:p="http://schemas.openxmlformats.org/presentationml/2006/main" xmlns:r="http://schemas.openxmlformats.org/officeDocument/2006/relationships">
+<p:sld xmlns:a="http://schemas.openxmlformats.org/drawingml/2006/main" xmlns:r="http://schemas.openxmlformats.org/officeDocument/2006/relationships" xmlns:p="http://schemas.openxmlformats.org/presentationml/2006/main">
   <p:cSld>
     <p:bg>
       <p:bgPr>
@@ -5997,7 +5873,14 @@
         <p:cNvGrpSpPr/>
         <p:nvPr/>
       </p:nvGrpSpPr>
-      <p:grpSpPr/>
+      <p:grpSpPr>
+        <a:xfrm>
+          <a:off x="0" y="0"/>
+          <a:ext cx="0" cy="0"/>
+          <a:chOff x="0" y="0"/>
+          <a:chExt cx="0" cy="0"/>
+        </a:xfrm>
+      </p:grpSpPr>
       <p:sp>
         <p:nvSpPr>
           <p:cNvPr id="2" name="TextBox 1"/>
@@ -6015,7 +5898,7 @@
           <a:noFill/>
         </p:spPr>
         <p:txBody>
-          <a:bodyPr wrap="square" anchor="t" lIns="0" rIns="0" tIns="0" bIns="0">
+          <a:bodyPr wrap="square" lIns="0" tIns="0" rIns="0" bIns="0" anchor="t">
             <a:spAutoFit/>
           </a:bodyPr>
           <a:lstStyle/>
@@ -6247,7 +6130,7 @@
           </a:fontRef>
         </p:style>
         <p:txBody>
-          <a:bodyPr rtlCol="0" anchor="ctr" wrap="square" lIns="45720" rIns="45720"/>
+          <a:bodyPr wrap="square" lIns="45720" rIns="45720" rtlCol="0" anchor="ctr"/>
           <a:lstStyle/>
           <a:p>
             <a:pPr algn="ctr"/>
@@ -6282,7 +6165,7 @@
           <a:noFill/>
         </p:spPr>
         <p:txBody>
-          <a:bodyPr wrap="square" anchor="t" lIns="0" rIns="0" tIns="0" bIns="0">
+          <a:bodyPr wrap="square" lIns="0" tIns="0" rIns="0" bIns="0" anchor="t">
             <a:spAutoFit/>
           </a:bodyPr>
           <a:lstStyle/>
@@ -6319,7 +6202,7 @@
           <a:noFill/>
         </p:spPr>
         <p:txBody>
-          <a:bodyPr wrap="square" anchor="t" lIns="0" rIns="0" tIns="0" bIns="0">
+          <a:bodyPr wrap="square" lIns="0" tIns="0" rIns="0" bIns="0" anchor="t">
             <a:spAutoFit/>
           </a:bodyPr>
           <a:lstStyle/>
@@ -6381,7 +6264,7 @@
           </a:fontRef>
         </p:style>
         <p:txBody>
-          <a:bodyPr rtlCol="0" anchor="ctr" wrap="square" lIns="45720" rIns="45720"/>
+          <a:bodyPr wrap="square" lIns="45720" rIns="45720" rtlCol="0" anchor="ctr"/>
           <a:lstStyle/>
           <a:p>
             <a:pPr algn="ctr"/>
@@ -6416,7 +6299,7 @@
           <a:noFill/>
         </p:spPr>
         <p:txBody>
-          <a:bodyPr wrap="square" anchor="t" lIns="0" rIns="0" tIns="0" bIns="0">
+          <a:bodyPr wrap="square" lIns="0" tIns="0" rIns="0" bIns="0" anchor="t">
             <a:spAutoFit/>
           </a:bodyPr>
           <a:lstStyle/>
@@ -6453,7 +6336,7 @@
           <a:noFill/>
         </p:spPr>
         <p:txBody>
-          <a:bodyPr wrap="square" anchor="t" lIns="0" rIns="0" tIns="0" bIns="0">
+          <a:bodyPr wrap="square" lIns="0" tIns="0" rIns="0" bIns="0" anchor="t">
             <a:spAutoFit/>
           </a:bodyPr>
           <a:lstStyle/>
@@ -6515,7 +6398,7 @@
           </a:fontRef>
         </p:style>
         <p:txBody>
-          <a:bodyPr rtlCol="0" anchor="ctr" wrap="square" lIns="45720" rIns="45720"/>
+          <a:bodyPr wrap="square" lIns="45720" rIns="45720" rtlCol="0" anchor="ctr"/>
           <a:lstStyle/>
           <a:p>
             <a:pPr algn="ctr"/>
@@ -6550,7 +6433,7 @@
           <a:noFill/>
         </p:spPr>
         <p:txBody>
-          <a:bodyPr wrap="square" anchor="t" lIns="0" rIns="0" tIns="0" bIns="0">
+          <a:bodyPr wrap="square" lIns="0" tIns="0" rIns="0" bIns="0" anchor="t">
             <a:spAutoFit/>
           </a:bodyPr>
           <a:lstStyle/>
@@ -6587,7 +6470,7 @@
           <a:noFill/>
         </p:spPr>
         <p:txBody>
-          <a:bodyPr wrap="square" anchor="t" lIns="0" rIns="0" tIns="0" bIns="0">
+          <a:bodyPr wrap="square" lIns="0" tIns="0" rIns="0" bIns="0" anchor="t">
             <a:spAutoFit/>
           </a:bodyPr>
           <a:lstStyle/>
@@ -6649,7 +6532,7 @@
           </a:fontRef>
         </p:style>
         <p:txBody>
-          <a:bodyPr rtlCol="0" anchor="ctr" wrap="square" lIns="45720" rIns="45720"/>
+          <a:bodyPr wrap="square" lIns="45720" rIns="45720" rtlCol="0" anchor="ctr"/>
           <a:lstStyle/>
           <a:p>
             <a:pPr algn="ctr"/>
@@ -6684,7 +6567,7 @@
           <a:noFill/>
         </p:spPr>
         <p:txBody>
-          <a:bodyPr wrap="square" anchor="t" lIns="0" rIns="0" tIns="0" bIns="0">
+          <a:bodyPr wrap="square" lIns="0" tIns="0" rIns="0" bIns="0" anchor="t">
             <a:spAutoFit/>
           </a:bodyPr>
           <a:lstStyle/>
@@ -6721,7 +6604,7 @@
           <a:noFill/>
         </p:spPr>
         <p:txBody>
-          <a:bodyPr wrap="square" anchor="t" lIns="0" rIns="0" tIns="0" bIns="0">
+          <a:bodyPr wrap="square" lIns="0" tIns="0" rIns="0" bIns="0" anchor="t">
             <a:spAutoFit/>
           </a:bodyPr>
           <a:lstStyle/>
@@ -6783,7 +6666,7 @@
           </a:fontRef>
         </p:style>
         <p:txBody>
-          <a:bodyPr rtlCol="0" anchor="ctr" wrap="square" lIns="45720" rIns="45720"/>
+          <a:bodyPr wrap="square" lIns="45720" rIns="45720" rtlCol="0" anchor="ctr"/>
           <a:lstStyle/>
           <a:p>
             <a:pPr algn="ctr"/>
@@ -6818,7 +6701,7 @@
           <a:noFill/>
         </p:spPr>
         <p:txBody>
-          <a:bodyPr wrap="square" anchor="t" lIns="0" rIns="0" tIns="0" bIns="0">
+          <a:bodyPr wrap="square" lIns="0" tIns="0" rIns="0" bIns="0" anchor="t">
             <a:spAutoFit/>
           </a:bodyPr>
           <a:lstStyle/>
@@ -6855,7 +6738,7 @@
           <a:noFill/>
         </p:spPr>
         <p:txBody>
-          <a:bodyPr wrap="square" anchor="t" lIns="0" rIns="0" tIns="0" bIns="0">
+          <a:bodyPr wrap="square" lIns="0" tIns="0" rIns="0" bIns="0" anchor="t">
             <a:spAutoFit/>
           </a:bodyPr>
           <a:lstStyle/>
@@ -6917,7 +6800,7 @@
           </a:fontRef>
         </p:style>
         <p:txBody>
-          <a:bodyPr rtlCol="0" anchor="ctr" wrap="square" lIns="45720" rIns="45720"/>
+          <a:bodyPr wrap="square" lIns="45720" rIns="45720" rtlCol="0" anchor="ctr"/>
           <a:lstStyle/>
           <a:p>
             <a:pPr algn="ctr"/>
@@ -6952,7 +6835,7 @@
           <a:noFill/>
         </p:spPr>
         <p:txBody>
-          <a:bodyPr wrap="square" anchor="t" lIns="0" rIns="0" tIns="0" bIns="0">
+          <a:bodyPr wrap="square" lIns="0" tIns="0" rIns="0" bIns="0" anchor="t">
             <a:spAutoFit/>
           </a:bodyPr>
           <a:lstStyle/>
@@ -6989,7 +6872,7 @@
           <a:noFill/>
         </p:spPr>
         <p:txBody>
-          <a:bodyPr wrap="square" anchor="t" lIns="0" rIns="0" tIns="0" bIns="0">
+          <a:bodyPr wrap="square" lIns="0" tIns="0" rIns="0" bIns="0" anchor="t">
             <a:spAutoFit/>
           </a:bodyPr>
           <a:lstStyle/>
@@ -7055,7 +6938,9 @@
         <p:txBody>
           <a:bodyPr rtlCol="0" anchor="ctr"/>
           <a:lstStyle/>
-          <a:p/>
+          <a:p>
+            <a:endParaRPr/>
+          </a:p>
         </p:txBody>
       </p:sp>
       <p:sp>
@@ -7075,7 +6960,7 @@
           <a:noFill/>
         </p:spPr>
         <p:txBody>
-          <a:bodyPr wrap="square" anchor="ctr" lIns="0" rIns="0" tIns="0" bIns="0">
+          <a:bodyPr wrap="square" lIns="0" tIns="0" rIns="0" bIns="0" anchor="ctr">
             <a:spAutoFit/>
           </a:bodyPr>
           <a:lstStyle/>
@@ -7104,7 +6989,7 @@
 </file>
 
 <file path=ppt/slides/slide2.xml><?xml version="1.0" encoding="utf-8"?>
-<p:sld xmlns:a="http://schemas.openxmlformats.org/drawingml/2006/main" xmlns:p="http://schemas.openxmlformats.org/presentationml/2006/main" xmlns:r="http://schemas.openxmlformats.org/officeDocument/2006/relationships">
+<p:sld xmlns:a="http://schemas.openxmlformats.org/drawingml/2006/main" xmlns:r="http://schemas.openxmlformats.org/officeDocument/2006/relationships" xmlns:p="http://schemas.openxmlformats.org/presentationml/2006/main">
   <p:cSld>
     <p:bg>
       <p:bgPr>
@@ -7120,7 +7005,14 @@
         <p:cNvGrpSpPr/>
         <p:nvPr/>
       </p:nvGrpSpPr>
-      <p:grpSpPr/>
+      <p:grpSpPr>
+        <a:xfrm>
+          <a:off x="0" y="0"/>
+          <a:ext cx="0" cy="0"/>
+          <a:chOff x="0" y="0"/>
+          <a:chExt cx="0" cy="0"/>
+        </a:xfrm>
+      </p:grpSpPr>
       <p:sp>
         <p:nvSpPr>
           <p:cNvPr id="2" name="TextBox 1"/>
@@ -7138,7 +7030,7 @@
           <a:noFill/>
         </p:spPr>
         <p:txBody>
-          <a:bodyPr wrap="square" anchor="t" lIns="0" rIns="0" tIns="0" bIns="0">
+          <a:bodyPr wrap="square" lIns="0" tIns="0" rIns="0" bIns="0" anchor="t">
             <a:spAutoFit/>
           </a:bodyPr>
           <a:lstStyle/>
@@ -7175,7 +7067,7 @@
           <a:noFill/>
         </p:spPr>
         <p:txBody>
-          <a:bodyPr wrap="square" anchor="t" lIns="0" rIns="0" tIns="0" bIns="0">
+          <a:bodyPr wrap="square" lIns="0" tIns="0" rIns="0" bIns="0" anchor="t">
             <a:spAutoFit/>
           </a:bodyPr>
           <a:lstStyle/>
@@ -7212,7 +7104,7 @@
           <a:noFill/>
         </p:spPr>
         <p:txBody>
-          <a:bodyPr wrap="square" anchor="t" lIns="0" rIns="0" tIns="0" bIns="0">
+          <a:bodyPr wrap="square" lIns="0" tIns="0" rIns="0" bIns="0" anchor="t">
             <a:spAutoFit/>
           </a:bodyPr>
           <a:lstStyle/>
@@ -7273,7 +7165,9 @@
         <p:txBody>
           <a:bodyPr rtlCol="0" anchor="ctr"/>
           <a:lstStyle/>
-          <a:p/>
+          <a:p>
+            <a:endParaRPr/>
+          </a:p>
         </p:txBody>
       </p:sp>
       <p:sp>
@@ -7293,7 +7187,7 @@
           <a:noFill/>
         </p:spPr>
         <p:txBody>
-          <a:bodyPr wrap="square" anchor="t" lIns="0" rIns="0" tIns="0" bIns="0">
+          <a:bodyPr wrap="square" lIns="0" tIns="0" rIns="0" bIns="0" anchor="t">
             <a:spAutoFit/>
           </a:bodyPr>
           <a:lstStyle/>
@@ -7330,7 +7224,7 @@
           <a:noFill/>
         </p:spPr>
         <p:txBody>
-          <a:bodyPr wrap="square" anchor="t" lIns="0" rIns="0" tIns="0" bIns="0">
+          <a:bodyPr wrap="square" lIns="0" tIns="0" rIns="0" bIns="0" anchor="t">
             <a:spAutoFit/>
           </a:bodyPr>
           <a:lstStyle/>
@@ -7372,7 +7266,7 @@
           <a:noFill/>
         </p:spPr>
         <p:txBody>
-          <a:bodyPr wrap="square" anchor="t" lIns="0" rIns="0" tIns="0" bIns="0">
+          <a:bodyPr wrap="square" lIns="0" tIns="0" rIns="0" bIns="0" anchor="t">
             <a:spAutoFit/>
           </a:bodyPr>
           <a:lstStyle/>
@@ -7436,7 +7330,9 @@
         <p:txBody>
           <a:bodyPr rtlCol="0" anchor="ctr"/>
           <a:lstStyle/>
-          <a:p/>
+          <a:p>
+            <a:endParaRPr/>
+          </a:p>
         </p:txBody>
       </p:sp>
       <p:sp>
@@ -7478,7 +7374,9 @@
         <p:txBody>
           <a:bodyPr rtlCol="0" anchor="ctr"/>
           <a:lstStyle/>
-          <a:p/>
+          <a:p>
+            <a:endParaRPr/>
+          </a:p>
         </p:txBody>
       </p:sp>
       <p:sp>
@@ -7520,7 +7418,9 @@
         <p:txBody>
           <a:bodyPr rtlCol="0" anchor="ctr"/>
           <a:lstStyle/>
-          <a:p/>
+          <a:p>
+            <a:endParaRPr/>
+          </a:p>
         </p:txBody>
       </p:sp>
       <p:sp>
@@ -7562,7 +7462,9 @@
         <p:txBody>
           <a:bodyPr rtlCol="0" anchor="ctr"/>
           <a:lstStyle/>
-          <a:p/>
+          <a:p>
+            <a:endParaRPr/>
+          </a:p>
         </p:txBody>
       </p:sp>
       <p:sp>
@@ -7604,7 +7506,9 @@
         <p:txBody>
           <a:bodyPr rtlCol="0" anchor="ctr"/>
           <a:lstStyle/>
-          <a:p/>
+          <a:p>
+            <a:endParaRPr/>
+          </a:p>
         </p:txBody>
       </p:sp>
       <p:sp>
@@ -7624,7 +7528,7 @@
           <a:noFill/>
         </p:spPr>
         <p:txBody>
-          <a:bodyPr wrap="square" anchor="ctr" lIns="0" rIns="0" tIns="0" bIns="0">
+          <a:bodyPr wrap="square" lIns="0" tIns="0" rIns="0" bIns="0" anchor="ctr">
             <a:spAutoFit/>
           </a:bodyPr>
           <a:lstStyle/>
@@ -7685,7 +7589,9 @@
         <p:txBody>
           <a:bodyPr rtlCol="0" anchor="ctr"/>
           <a:lstStyle/>
-          <a:p/>
+          <a:p>
+            <a:endParaRPr/>
+          </a:p>
         </p:txBody>
       </p:sp>
       <p:sp>
@@ -7725,7 +7631,7 @@
           </a:fontRef>
         </p:style>
         <p:txBody>
-          <a:bodyPr rtlCol="0" anchor="ctr" wrap="square" lIns="45720" rIns="45720"/>
+          <a:bodyPr wrap="square" lIns="45720" rIns="45720" rtlCol="0" anchor="ctr"/>
           <a:lstStyle/>
           <a:p>
             <a:pPr algn="ctr"/>
@@ -7760,7 +7666,7 @@
           <a:noFill/>
         </p:spPr>
         <p:txBody>
-          <a:bodyPr wrap="square" anchor="t" lIns="0" rIns="0" tIns="0" bIns="0">
+          <a:bodyPr wrap="square" lIns="0" tIns="0" rIns="0" bIns="0" anchor="t">
             <a:spAutoFit/>
           </a:bodyPr>
           <a:lstStyle/>
@@ -7797,7 +7703,7 @@
           <a:noFill/>
         </p:spPr>
         <p:txBody>
-          <a:bodyPr wrap="square" anchor="t" lIns="0" rIns="0" tIns="0" bIns="0">
+          <a:bodyPr wrap="square" lIns="0" tIns="0" rIns="0" bIns="0" anchor="t">
             <a:spAutoFit/>
           </a:bodyPr>
           <a:lstStyle/>
@@ -7858,7 +7764,9 @@
         <p:txBody>
           <a:bodyPr rtlCol="0" anchor="ctr"/>
           <a:lstStyle/>
-          <a:p/>
+          <a:p>
+            <a:endParaRPr/>
+          </a:p>
         </p:txBody>
       </p:sp>
       <p:sp>
@@ -7898,7 +7806,7 @@
           </a:fontRef>
         </p:style>
         <p:txBody>
-          <a:bodyPr rtlCol="0" anchor="ctr" wrap="square" lIns="45720" rIns="45720"/>
+          <a:bodyPr wrap="square" lIns="45720" rIns="45720" rtlCol="0" anchor="ctr"/>
           <a:lstStyle/>
           <a:p>
             <a:pPr algn="ctr"/>
@@ -7933,7 +7841,7 @@
           <a:noFill/>
         </p:spPr>
         <p:txBody>
-          <a:bodyPr wrap="square" anchor="t" lIns="0" rIns="0" tIns="0" bIns="0">
+          <a:bodyPr wrap="square" lIns="0" tIns="0" rIns="0" bIns="0" anchor="t">
             <a:spAutoFit/>
           </a:bodyPr>
           <a:lstStyle/>
@@ -7970,7 +7878,7 @@
           <a:noFill/>
         </p:spPr>
         <p:txBody>
-          <a:bodyPr wrap="square" anchor="t" lIns="0" rIns="0" tIns="0" bIns="0">
+          <a:bodyPr wrap="square" lIns="0" tIns="0" rIns="0" bIns="0" anchor="t">
             <a:spAutoFit/>
           </a:bodyPr>
           <a:lstStyle/>
@@ -8031,7 +7939,9 @@
         <p:txBody>
           <a:bodyPr rtlCol="0" anchor="ctr"/>
           <a:lstStyle/>
-          <a:p/>
+          <a:p>
+            <a:endParaRPr/>
+          </a:p>
         </p:txBody>
       </p:sp>
       <p:sp>
@@ -8071,7 +7981,7 @@
           </a:fontRef>
         </p:style>
         <p:txBody>
-          <a:bodyPr rtlCol="0" anchor="ctr" wrap="square" lIns="45720" rIns="45720"/>
+          <a:bodyPr wrap="square" lIns="45720" rIns="45720" rtlCol="0" anchor="ctr"/>
           <a:lstStyle/>
           <a:p>
             <a:pPr algn="ctr"/>
@@ -8106,7 +8016,7 @@
           <a:noFill/>
         </p:spPr>
         <p:txBody>
-          <a:bodyPr wrap="square" anchor="t" lIns="0" rIns="0" tIns="0" bIns="0">
+          <a:bodyPr wrap="square" lIns="0" tIns="0" rIns="0" bIns="0" anchor="t">
             <a:spAutoFit/>
           </a:bodyPr>
           <a:lstStyle/>
@@ -8143,7 +8053,7 @@
           <a:noFill/>
         </p:spPr>
         <p:txBody>
-          <a:bodyPr wrap="square" anchor="t" lIns="0" rIns="0" tIns="0" bIns="0">
+          <a:bodyPr wrap="square" lIns="0" tIns="0" rIns="0" bIns="0" anchor="t">
             <a:spAutoFit/>
           </a:bodyPr>
           <a:lstStyle/>
@@ -8172,7 +8082,7 @@
 </file>
 
 <file path=ppt/slides/slide3.xml><?xml version="1.0" encoding="utf-8"?>
-<p:sld xmlns:a="http://schemas.openxmlformats.org/drawingml/2006/main" xmlns:p="http://schemas.openxmlformats.org/presentationml/2006/main" xmlns:r="http://schemas.openxmlformats.org/officeDocument/2006/relationships">
+<p:sld xmlns:a="http://schemas.openxmlformats.org/drawingml/2006/main" xmlns:r="http://schemas.openxmlformats.org/officeDocument/2006/relationships" xmlns:p="http://schemas.openxmlformats.org/presentationml/2006/main">
   <p:cSld>
     <p:bg>
       <p:bgPr>
@@ -8188,7 +8098,14 @@
         <p:cNvGrpSpPr/>
         <p:nvPr/>
       </p:nvGrpSpPr>
-      <p:grpSpPr/>
+      <p:grpSpPr>
+        <a:xfrm>
+          <a:off x="0" y="0"/>
+          <a:ext cx="0" cy="0"/>
+          <a:chOff x="0" y="0"/>
+          <a:chExt cx="0" cy="0"/>
+        </a:xfrm>
+      </p:grpSpPr>
       <p:sp>
         <p:nvSpPr>
           <p:cNvPr id="2" name="TextBox 1"/>
@@ -8206,7 +8123,7 @@
           <a:noFill/>
         </p:spPr>
         <p:txBody>
-          <a:bodyPr wrap="square" anchor="t" lIns="0" rIns="0" tIns="0" bIns="0">
+          <a:bodyPr wrap="square" lIns="0" tIns="0" rIns="0" bIns="0" anchor="t">
             <a:spAutoFit/>
           </a:bodyPr>
           <a:lstStyle/>
@@ -8243,7 +8160,7 @@
           <a:noFill/>
         </p:spPr>
         <p:txBody>
-          <a:bodyPr wrap="square" anchor="t" lIns="0" rIns="0" tIns="0" bIns="0">
+          <a:bodyPr wrap="square" lIns="0" tIns="0" rIns="0" bIns="0" anchor="t">
             <a:spAutoFit/>
           </a:bodyPr>
           <a:lstStyle/>
@@ -8280,7 +8197,7 @@
           <a:noFill/>
         </p:spPr>
         <p:txBody>
-          <a:bodyPr wrap="square" anchor="t" lIns="0" rIns="0" tIns="0" bIns="0">
+          <a:bodyPr wrap="square" lIns="0" tIns="0" rIns="0" bIns="0" anchor="t">
             <a:spAutoFit/>
           </a:bodyPr>
           <a:lstStyle/>
@@ -8341,7 +8258,9 @@
         <p:txBody>
           <a:bodyPr rtlCol="0" anchor="ctr"/>
           <a:lstStyle/>
-          <a:p/>
+          <a:p>
+            <a:endParaRPr/>
+          </a:p>
         </p:txBody>
       </p:sp>
       <p:sp>
@@ -8381,7 +8300,7 @@
           </a:fontRef>
         </p:style>
         <p:txBody>
-          <a:bodyPr rtlCol="0" anchor="ctr" wrap="square" lIns="45720" rIns="45720"/>
+          <a:bodyPr wrap="square" lIns="45720" rIns="45720" rtlCol="0" anchor="ctr"/>
           <a:lstStyle/>
           <a:p>
             <a:pPr algn="ctr"/>
@@ -8416,7 +8335,7 @@
           <a:noFill/>
         </p:spPr>
         <p:txBody>
-          <a:bodyPr wrap="square" anchor="t" lIns="0" rIns="0" tIns="0" bIns="0">
+          <a:bodyPr wrap="square" lIns="0" tIns="0" rIns="0" bIns="0" anchor="t">
             <a:spAutoFit/>
           </a:bodyPr>
           <a:lstStyle/>
@@ -8453,7 +8372,7 @@
           <a:noFill/>
         </p:spPr>
         <p:txBody>
-          <a:bodyPr wrap="square" anchor="t" lIns="0" rIns="0" tIns="0" bIns="0">
+          <a:bodyPr wrap="square" lIns="0" tIns="0" rIns="0" bIns="0" anchor="t">
             <a:spAutoFit/>
           </a:bodyPr>
           <a:lstStyle/>
@@ -8521,7 +8440,9 @@
         <p:txBody>
           <a:bodyPr rtlCol="0" anchor="ctr"/>
           <a:lstStyle/>
-          <a:p/>
+          <a:p>
+            <a:endParaRPr/>
+          </a:p>
         </p:txBody>
       </p:sp>
       <p:sp>
@@ -8561,7 +8482,7 @@
           </a:fontRef>
         </p:style>
         <p:txBody>
-          <a:bodyPr rtlCol="0" anchor="ctr" wrap="square" lIns="45720" rIns="45720"/>
+          <a:bodyPr wrap="square" lIns="45720" rIns="45720" rtlCol="0" anchor="ctr"/>
           <a:lstStyle/>
           <a:p>
             <a:pPr algn="ctr"/>
@@ -8596,7 +8517,7 @@
           <a:noFill/>
         </p:spPr>
         <p:txBody>
-          <a:bodyPr wrap="square" anchor="t" lIns="0" rIns="0" tIns="0" bIns="0">
+          <a:bodyPr wrap="square" lIns="0" tIns="0" rIns="0" bIns="0" anchor="t">
             <a:spAutoFit/>
           </a:bodyPr>
           <a:lstStyle/>
@@ -8633,7 +8554,7 @@
           <a:noFill/>
         </p:spPr>
         <p:txBody>
-          <a:bodyPr wrap="square" anchor="t" lIns="0" rIns="0" tIns="0" bIns="0">
+          <a:bodyPr wrap="square" lIns="0" tIns="0" rIns="0" bIns="0" anchor="t">
             <a:spAutoFit/>
           </a:bodyPr>
           <a:lstStyle/>
@@ -8700,7 +8621,9 @@
         <p:txBody>
           <a:bodyPr rtlCol="0" anchor="ctr"/>
           <a:lstStyle/>
-          <a:p/>
+          <a:p>
+            <a:endParaRPr/>
+          </a:p>
         </p:txBody>
       </p:sp>
       <p:sp>
@@ -8740,7 +8663,7 @@
           </a:fontRef>
         </p:style>
         <p:txBody>
-          <a:bodyPr rtlCol="0" anchor="ctr" wrap="square" lIns="45720" rIns="45720"/>
+          <a:bodyPr wrap="square" lIns="45720" rIns="45720" rtlCol="0" anchor="ctr"/>
           <a:lstStyle/>
           <a:p>
             <a:pPr algn="ctr"/>
@@ -8775,7 +8698,7 @@
           <a:noFill/>
         </p:spPr>
         <p:txBody>
-          <a:bodyPr wrap="square" anchor="t" lIns="0" rIns="0" tIns="0" bIns="0">
+          <a:bodyPr wrap="square" lIns="0" tIns="0" rIns="0" bIns="0" anchor="t">
             <a:spAutoFit/>
           </a:bodyPr>
           <a:lstStyle/>
@@ -8812,7 +8735,7 @@
           <a:noFill/>
         </p:spPr>
         <p:txBody>
-          <a:bodyPr wrap="square" anchor="t" lIns="0" rIns="0" tIns="0" bIns="0">
+          <a:bodyPr wrap="square" lIns="0" tIns="0" rIns="0" bIns="0" anchor="t">
             <a:spAutoFit/>
           </a:bodyPr>
           <a:lstStyle/>
@@ -8879,7 +8802,9 @@
         <p:txBody>
           <a:bodyPr rtlCol="0" anchor="ctr"/>
           <a:lstStyle/>
-          <a:p/>
+          <a:p>
+            <a:endParaRPr/>
+          </a:p>
         </p:txBody>
       </p:sp>
       <p:sp>
@@ -8899,7 +8824,7 @@
           <a:noFill/>
         </p:spPr>
         <p:txBody>
-          <a:bodyPr wrap="square" anchor="ctr" lIns="0" rIns="0" tIns="0" bIns="0">
+          <a:bodyPr wrap="square" lIns="0" tIns="0" rIns="0" bIns="0" anchor="ctr">
             <a:spAutoFit/>
           </a:bodyPr>
           <a:lstStyle/>
@@ -8939,7 +8864,7 @@
 </file>
 
 <file path=ppt/slides/slide4.xml><?xml version="1.0" encoding="utf-8"?>
-<p:sld xmlns:a="http://schemas.openxmlformats.org/drawingml/2006/main" xmlns:p="http://schemas.openxmlformats.org/presentationml/2006/main" xmlns:r="http://schemas.openxmlformats.org/officeDocument/2006/relationships">
+<p:sld xmlns:a="http://schemas.openxmlformats.org/drawingml/2006/main" xmlns:r="http://schemas.openxmlformats.org/officeDocument/2006/relationships" xmlns:p="http://schemas.openxmlformats.org/presentationml/2006/main">
   <p:cSld>
     <p:bg>
       <p:bgPr>
@@ -8955,7 +8880,14 @@
         <p:cNvGrpSpPr/>
         <p:nvPr/>
       </p:nvGrpSpPr>
-      <p:grpSpPr/>
+      <p:grpSpPr>
+        <a:xfrm>
+          <a:off x="0" y="0"/>
+          <a:ext cx="0" cy="0"/>
+          <a:chOff x="0" y="0"/>
+          <a:chExt cx="0" cy="0"/>
+        </a:xfrm>
+      </p:grpSpPr>
       <p:sp>
         <p:nvSpPr>
           <p:cNvPr id="2" name="TextBox 1"/>
@@ -8973,7 +8905,7 @@
           <a:noFill/>
         </p:spPr>
         <p:txBody>
-          <a:bodyPr wrap="square" anchor="t" lIns="0" rIns="0" tIns="0" bIns="0">
+          <a:bodyPr wrap="square" lIns="0" tIns="0" rIns="0" bIns="0" anchor="t">
             <a:spAutoFit/>
           </a:bodyPr>
           <a:lstStyle/>
@@ -9010,7 +8942,7 @@
           <a:noFill/>
         </p:spPr>
         <p:txBody>
-          <a:bodyPr wrap="square" anchor="t" lIns="0" rIns="0" tIns="0" bIns="0">
+          <a:bodyPr wrap="square" lIns="0" tIns="0" rIns="0" bIns="0" anchor="t">
             <a:spAutoFit/>
           </a:bodyPr>
           <a:lstStyle/>
@@ -9047,7 +8979,7 @@
           <a:noFill/>
         </p:spPr>
         <p:txBody>
-          <a:bodyPr wrap="square" anchor="t" lIns="0" rIns="0" tIns="0" bIns="0">
+          <a:bodyPr wrap="square" lIns="0" tIns="0" rIns="0" bIns="0" anchor="t">
             <a:spAutoFit/>
           </a:bodyPr>
           <a:lstStyle/>
@@ -9108,7 +9040,9 @@
         <p:txBody>
           <a:bodyPr rtlCol="0" anchor="ctr"/>
           <a:lstStyle/>
-          <a:p/>
+          <a:p>
+            <a:endParaRPr/>
+          </a:p>
         </p:txBody>
       </p:sp>
       <p:sp>
@@ -9148,7 +9082,7 @@
           </a:fontRef>
         </p:style>
         <p:txBody>
-          <a:bodyPr rtlCol="0" anchor="ctr" wrap="square" lIns="45720" rIns="45720"/>
+          <a:bodyPr wrap="square" lIns="45720" rIns="45720" rtlCol="0" anchor="ctr"/>
           <a:lstStyle/>
           <a:p>
             <a:pPr algn="ctr"/>
@@ -9183,7 +9117,7 @@
           <a:noFill/>
         </p:spPr>
         <p:txBody>
-          <a:bodyPr wrap="square" anchor="t" lIns="0" rIns="0" tIns="0" bIns="0">
+          <a:bodyPr wrap="square" lIns="0" tIns="0" rIns="0" bIns="0" anchor="t">
             <a:spAutoFit/>
           </a:bodyPr>
           <a:lstStyle/>
@@ -9220,7 +9154,7 @@
           <a:noFill/>
         </p:spPr>
         <p:txBody>
-          <a:bodyPr wrap="square" anchor="t" lIns="0" rIns="0" tIns="0" bIns="0">
+          <a:bodyPr wrap="square" lIns="0" tIns="0" rIns="0" bIns="0" anchor="t">
             <a:spAutoFit/>
           </a:bodyPr>
           <a:lstStyle/>
@@ -9323,7 +9257,9 @@
         <p:txBody>
           <a:bodyPr rtlCol="0" anchor="ctr"/>
           <a:lstStyle/>
-          <a:p/>
+          <a:p>
+            <a:endParaRPr/>
+          </a:p>
         </p:txBody>
       </p:sp>
       <p:sp>
@@ -9363,7 +9299,7 @@
           </a:fontRef>
         </p:style>
         <p:txBody>
-          <a:bodyPr rtlCol="0" anchor="ctr" wrap="square" lIns="45720" rIns="45720"/>
+          <a:bodyPr wrap="square" lIns="45720" rIns="45720" rtlCol="0" anchor="ctr"/>
           <a:lstStyle/>
           <a:p>
             <a:pPr algn="ctr"/>
@@ -9398,7 +9334,7 @@
           <a:noFill/>
         </p:spPr>
         <p:txBody>
-          <a:bodyPr wrap="square" anchor="t" lIns="0" rIns="0" tIns="0" bIns="0">
+          <a:bodyPr wrap="square" lIns="0" tIns="0" rIns="0" bIns="0" anchor="t">
             <a:spAutoFit/>
           </a:bodyPr>
           <a:lstStyle/>
@@ -9435,7 +9371,7 @@
           <a:noFill/>
         </p:spPr>
         <p:txBody>
-          <a:bodyPr wrap="square" anchor="t" lIns="0" rIns="0" tIns="0" bIns="0">
+          <a:bodyPr wrap="square" lIns="0" tIns="0" rIns="0" bIns="0" anchor="t">
             <a:spAutoFit/>
           </a:bodyPr>
           <a:lstStyle/>
@@ -9538,7 +9474,9 @@
         <p:txBody>
           <a:bodyPr rtlCol="0" anchor="ctr"/>
           <a:lstStyle/>
-          <a:p/>
+          <a:p>
+            <a:endParaRPr/>
+          </a:p>
         </p:txBody>
       </p:sp>
       <p:sp>
@@ -9578,7 +9516,7 @@
           </a:fontRef>
         </p:style>
         <p:txBody>
-          <a:bodyPr rtlCol="0" anchor="ctr" wrap="square" lIns="45720" rIns="45720"/>
+          <a:bodyPr wrap="square" lIns="45720" rIns="45720" rtlCol="0" anchor="ctr"/>
           <a:lstStyle/>
           <a:p>
             <a:pPr algn="ctr"/>
@@ -9613,7 +9551,7 @@
           <a:noFill/>
         </p:spPr>
         <p:txBody>
-          <a:bodyPr wrap="square" anchor="t" lIns="0" rIns="0" tIns="0" bIns="0">
+          <a:bodyPr wrap="square" lIns="0" tIns="0" rIns="0" bIns="0" anchor="t">
             <a:spAutoFit/>
           </a:bodyPr>
           <a:lstStyle/>
@@ -9650,7 +9588,7 @@
           <a:noFill/>
         </p:spPr>
         <p:txBody>
-          <a:bodyPr wrap="square" anchor="t" lIns="0" rIns="0" tIns="0" bIns="0">
+          <a:bodyPr wrap="square" lIns="0" tIns="0" rIns="0" bIns="0" anchor="t">
             <a:spAutoFit/>
           </a:bodyPr>
           <a:lstStyle/>
@@ -9753,7 +9691,9 @@
         <p:txBody>
           <a:bodyPr rtlCol="0" anchor="ctr"/>
           <a:lstStyle/>
-          <a:p/>
+          <a:p>
+            <a:endParaRPr/>
+          </a:p>
         </p:txBody>
       </p:sp>
       <p:sp>
@@ -9793,7 +9733,7 @@
           </a:fontRef>
         </p:style>
         <p:txBody>
-          <a:bodyPr rtlCol="0" anchor="ctr" wrap="square" lIns="45720" rIns="45720"/>
+          <a:bodyPr wrap="square" lIns="45720" rIns="45720" rtlCol="0" anchor="ctr"/>
           <a:lstStyle/>
           <a:p>
             <a:pPr algn="ctr"/>
@@ -9828,7 +9768,7 @@
           <a:noFill/>
         </p:spPr>
         <p:txBody>
-          <a:bodyPr wrap="square" anchor="t" lIns="0" rIns="0" tIns="0" bIns="0">
+          <a:bodyPr wrap="square" lIns="0" tIns="0" rIns="0" bIns="0" anchor="t">
             <a:spAutoFit/>
           </a:bodyPr>
           <a:lstStyle/>
@@ -9865,7 +9805,7 @@
           <a:noFill/>
         </p:spPr>
         <p:txBody>
-          <a:bodyPr wrap="square" anchor="t" lIns="0" rIns="0" tIns="0" bIns="0">
+          <a:bodyPr wrap="square" lIns="0" tIns="0" rIns="0" bIns="0" anchor="t">
             <a:spAutoFit/>
           </a:bodyPr>
           <a:lstStyle/>
@@ -9931,7 +9871,9 @@
         <p:txBody>
           <a:bodyPr rtlCol="0" anchor="ctr"/>
           <a:lstStyle/>
-          <a:p/>
+          <a:p>
+            <a:endParaRPr/>
+          </a:p>
         </p:txBody>
       </p:sp>
       <p:sp>
@@ -9971,7 +9913,7 @@
           </a:fontRef>
         </p:style>
         <p:txBody>
-          <a:bodyPr rtlCol="0" anchor="ctr" wrap="square" lIns="45720" rIns="45720"/>
+          <a:bodyPr wrap="square" lIns="45720" rIns="45720" rtlCol="0" anchor="ctr"/>
           <a:lstStyle/>
           <a:p>
             <a:pPr algn="ctr"/>
@@ -10006,7 +9948,7 @@
           <a:noFill/>
         </p:spPr>
         <p:txBody>
-          <a:bodyPr wrap="square" anchor="ctr" lIns="0" rIns="0" tIns="0" bIns="0">
+          <a:bodyPr wrap="square" lIns="0" tIns="0" rIns="0" bIns="0" anchor="ctr">
             <a:spAutoFit/>
           </a:bodyPr>
           <a:lstStyle/>
@@ -10046,7 +9988,7 @@
 </file>
 
 <file path=ppt/slides/slide5.xml><?xml version="1.0" encoding="utf-8"?>
-<p:sld xmlns:a="http://schemas.openxmlformats.org/drawingml/2006/main" xmlns:p="http://schemas.openxmlformats.org/presentationml/2006/main" xmlns:r="http://schemas.openxmlformats.org/officeDocument/2006/relationships">
+<p:sld xmlns:a="http://schemas.openxmlformats.org/drawingml/2006/main" xmlns:r="http://schemas.openxmlformats.org/officeDocument/2006/relationships" xmlns:p="http://schemas.openxmlformats.org/presentationml/2006/main">
   <p:cSld>
     <p:bg>
       <p:bgPr>
@@ -10062,7 +10004,14 @@
         <p:cNvGrpSpPr/>
         <p:nvPr/>
       </p:nvGrpSpPr>
-      <p:grpSpPr/>
+      <p:grpSpPr>
+        <a:xfrm>
+          <a:off x="0" y="0"/>
+          <a:ext cx="0" cy="0"/>
+          <a:chOff x="0" y="0"/>
+          <a:chExt cx="0" cy="0"/>
+        </a:xfrm>
+      </p:grpSpPr>
       <p:sp>
         <p:nvSpPr>
           <p:cNvPr id="2" name="TextBox 1"/>
@@ -10080,7 +10029,7 @@
           <a:noFill/>
         </p:spPr>
         <p:txBody>
-          <a:bodyPr wrap="square" anchor="t" lIns="0" rIns="0" tIns="0" bIns="0">
+          <a:bodyPr wrap="square" lIns="0" tIns="0" rIns="0" bIns="0" anchor="t">
             <a:spAutoFit/>
           </a:bodyPr>
           <a:lstStyle/>
@@ -10117,7 +10066,7 @@
           <a:noFill/>
         </p:spPr>
         <p:txBody>
-          <a:bodyPr wrap="square" anchor="t" lIns="0" rIns="0" tIns="0" bIns="0">
+          <a:bodyPr wrap="square" lIns="0" tIns="0" rIns="0" bIns="0" anchor="t">
             <a:spAutoFit/>
           </a:bodyPr>
           <a:lstStyle/>
@@ -10154,7 +10103,7 @@
           <a:noFill/>
         </p:spPr>
         <p:txBody>
-          <a:bodyPr wrap="square" anchor="t" lIns="0" rIns="0" tIns="0" bIns="0">
+          <a:bodyPr wrap="square" lIns="0" tIns="0" rIns="0" bIns="0" anchor="t">
             <a:spAutoFit/>
           </a:bodyPr>
           <a:lstStyle/>
@@ -10244,6 +10193,7 @@
           <a:lstStyle/>
           <a:p>
             <a:pPr algn="ctr"/>
+            <a:endParaRPr/>
           </a:p>
         </p:txBody>
       </p:sp>
@@ -10311,6 +10261,7 @@
           <a:lstStyle/>
           <a:p>
             <a:pPr algn="ctr"/>
+            <a:endParaRPr/>
           </a:p>
         </p:txBody>
       </p:sp>
@@ -10378,6 +10329,7 @@
           <a:lstStyle/>
           <a:p>
             <a:pPr algn="ctr"/>
+            <a:endParaRPr/>
           </a:p>
         </p:txBody>
       </p:sp>
@@ -10445,6 +10397,7 @@
           <a:lstStyle/>
           <a:p>
             <a:pPr algn="ctr"/>
+            <a:endParaRPr/>
           </a:p>
         </p:txBody>
       </p:sp>
@@ -10512,6 +10465,7 @@
           <a:lstStyle/>
           <a:p>
             <a:pPr algn="ctr"/>
+            <a:endParaRPr/>
           </a:p>
         </p:txBody>
       </p:sp>
@@ -10577,6 +10531,7 @@
           <a:lstStyle/>
           <a:p>
             <a:pPr algn="ctr"/>
+            <a:endParaRPr/>
           </a:p>
         </p:txBody>
       </p:sp>
@@ -10642,6 +10597,7 @@
           <a:lstStyle/>
           <a:p>
             <a:pPr algn="ctr"/>
+            <a:endParaRPr/>
           </a:p>
         </p:txBody>
       </p:sp>
@@ -10707,6 +10663,7 @@
           <a:lstStyle/>
           <a:p>
             <a:pPr algn="ctr"/>
+            <a:endParaRPr/>
           </a:p>
         </p:txBody>
       </p:sp>
@@ -10772,6 +10729,7 @@
           <a:lstStyle/>
           <a:p>
             <a:pPr algn="ctr"/>
+            <a:endParaRPr/>
           </a:p>
         </p:txBody>
       </p:sp>
@@ -10837,6 +10795,7 @@
           <a:lstStyle/>
           <a:p>
             <a:pPr algn="ctr"/>
+            <a:endParaRPr/>
           </a:p>
         </p:txBody>
       </p:sp>
@@ -10902,6 +10861,7 @@
           <a:lstStyle/>
           <a:p>
             <a:pPr algn="ctr"/>
+            <a:endParaRPr/>
           </a:p>
         </p:txBody>
       </p:sp>
@@ -11041,6 +11001,7 @@
           <a:lstStyle/>
           <a:p>
             <a:pPr algn="ctr"/>
+            <a:endParaRPr/>
           </a:p>
         </p:txBody>
       </p:sp>
@@ -11178,6 +11139,7 @@
           <a:lstStyle/>
           <a:p>
             <a:pPr algn="ctr"/>
+            <a:endParaRPr/>
           </a:p>
         </p:txBody>
       </p:sp>
@@ -11317,6 +11279,7 @@
           <a:lstStyle/>
           <a:p>
             <a:pPr algn="ctr"/>
+            <a:endParaRPr/>
           </a:p>
         </p:txBody>
       </p:sp>
@@ -11456,6 +11419,7 @@
           <a:lstStyle/>
           <a:p>
             <a:pPr algn="ctr"/>
+            <a:endParaRPr/>
           </a:p>
         </p:txBody>
       </p:sp>
@@ -11595,6 +11559,7 @@
           <a:lstStyle/>
           <a:p>
             <a:pPr algn="ctr"/>
+            <a:endParaRPr/>
           </a:p>
         </p:txBody>
       </p:sp>
@@ -11734,6 +11699,7 @@
           <a:lstStyle/>
           <a:p>
             <a:pPr algn="ctr"/>
+            <a:endParaRPr/>
           </a:p>
         </p:txBody>
       </p:sp>
@@ -11873,6 +11839,7 @@
           <a:lstStyle/>
           <a:p>
             <a:pPr algn="ctr"/>
+            <a:endParaRPr/>
           </a:p>
         </p:txBody>
       </p:sp>
@@ -11940,6 +11907,7 @@
           <a:lstStyle/>
           <a:p>
             <a:pPr algn="ctr"/>
+            <a:endParaRPr/>
           </a:p>
         </p:txBody>
       </p:sp>
@@ -12007,6 +11975,7 @@
           <a:lstStyle/>
           <a:p>
             <a:pPr algn="ctr"/>
+            <a:endParaRPr/>
           </a:p>
         </p:txBody>
       </p:sp>
@@ -12074,6 +12043,7 @@
           <a:lstStyle/>
           <a:p>
             <a:pPr algn="ctr"/>
+            <a:endParaRPr/>
           </a:p>
         </p:txBody>
       </p:sp>
@@ -12141,6 +12111,7 @@
           <a:lstStyle/>
           <a:p>
             <a:pPr algn="ctr"/>
+            <a:endParaRPr/>
           </a:p>
         </p:txBody>
       </p:sp>
@@ -12208,6 +12179,7 @@
           <a:lstStyle/>
           <a:p>
             <a:pPr algn="ctr"/>
+            <a:endParaRPr/>
           </a:p>
         </p:txBody>
       </p:sp>
@@ -12273,6 +12245,7 @@
           <a:lstStyle/>
           <a:p>
             <a:pPr algn="ctr"/>
+            <a:endParaRPr/>
           </a:p>
         </p:txBody>
       </p:sp>
@@ -12317,7 +12290,9 @@
         <p:txBody>
           <a:bodyPr rtlCol="0" anchor="ctr"/>
           <a:lstStyle/>
-          <a:p/>
+          <a:p>
+            <a:endParaRPr/>
+          </a:p>
         </p:txBody>
       </p:sp>
       <p:cxnSp>
@@ -12437,6 +12412,7 @@
           <a:lstStyle/>
           <a:p>
             <a:pPr algn="ctr"/>
+            <a:endParaRPr/>
           </a:p>
         </p:txBody>
       </p:sp>
@@ -12522,6 +12498,7 @@
           <a:lstStyle/>
           <a:p>
             <a:pPr algn="ctr"/>
+            <a:endParaRPr/>
           </a:p>
         </p:txBody>
       </p:sp>
@@ -12607,6 +12584,7 @@
           <a:lstStyle/>
           <a:p>
             <a:pPr algn="ctr"/>
+            <a:endParaRPr/>
           </a:p>
         </p:txBody>
       </p:sp>
@@ -12649,7 +12627,9 @@
         <p:txBody>
           <a:bodyPr rtlCol="0" anchor="ctr"/>
           <a:lstStyle/>
-          <a:p/>
+          <a:p>
+            <a:endParaRPr/>
+          </a:p>
         </p:txBody>
       </p:sp>
       <p:sp>
@@ -12669,7 +12649,7 @@
           <a:noFill/>
         </p:spPr>
         <p:txBody>
-          <a:bodyPr wrap="square" anchor="t" lIns="0" rIns="0" tIns="0" bIns="0">
+          <a:bodyPr wrap="square" lIns="0" tIns="0" rIns="0" bIns="0" anchor="t">
             <a:spAutoFit/>
           </a:bodyPr>
           <a:lstStyle/>
@@ -12730,7 +12710,9 @@
         <p:txBody>
           <a:bodyPr rtlCol="0" anchor="ctr"/>
           <a:lstStyle/>
-          <a:p/>
+          <a:p>
+            <a:endParaRPr/>
+          </a:p>
         </p:txBody>
       </p:sp>
       <p:sp>
@@ -12750,7 +12732,7 @@
           <a:noFill/>
         </p:spPr>
         <p:txBody>
-          <a:bodyPr wrap="square" anchor="t" lIns="0" rIns="0" tIns="0" bIns="0">
+          <a:bodyPr wrap="square" lIns="0" tIns="0" rIns="0" bIns="0" anchor="t">
             <a:spAutoFit/>
           </a:bodyPr>
           <a:lstStyle/>
@@ -12787,7 +12769,7 @@
           <a:noFill/>
         </p:spPr>
         <p:txBody>
-          <a:bodyPr wrap="square" anchor="t" lIns="0" rIns="0" tIns="0" bIns="0">
+          <a:bodyPr wrap="square" lIns="0" tIns="0" rIns="0" bIns="0" anchor="t">
             <a:spAutoFit/>
           </a:bodyPr>
           <a:lstStyle/>
@@ -12890,7 +12872,9 @@
         <p:txBody>
           <a:bodyPr rtlCol="0" anchor="ctr"/>
           <a:lstStyle/>
-          <a:p/>
+          <a:p>
+            <a:endParaRPr/>
+          </a:p>
         </p:txBody>
       </p:sp>
       <p:sp>
@@ -12934,7 +12918,9 @@
         <p:txBody>
           <a:bodyPr rtlCol="0" anchor="ctr"/>
           <a:lstStyle/>
-          <a:p/>
+          <a:p>
+            <a:endParaRPr/>
+          </a:p>
         </p:txBody>
       </p:sp>
       <p:sp>
@@ -12954,7 +12940,7 @@
           <a:noFill/>
         </p:spPr>
         <p:txBody>
-          <a:bodyPr wrap="square" anchor="t" lIns="0" rIns="0" tIns="0" bIns="0">
+          <a:bodyPr wrap="square" lIns="0" tIns="0" rIns="0" bIns="0" anchor="t">
             <a:spAutoFit/>
           </a:bodyPr>
           <a:lstStyle/>
@@ -12991,7 +12977,7 @@
           <a:noFill/>
         </p:spPr>
         <p:txBody>
-          <a:bodyPr wrap="square" anchor="t" lIns="0" rIns="0" tIns="0" bIns="0">
+          <a:bodyPr wrap="square" lIns="0" tIns="0" rIns="0" bIns="0" anchor="t">
             <a:spAutoFit/>
           </a:bodyPr>
           <a:lstStyle/>
@@ -13004,17 +12990,7 @@
                 <a:spcPts val="200"/>
               </a:spcAft>
             </a:pPr>
-            <a:r>
-              <a:rPr sz="1100" b="0" i="0">
-                <a:solidFill>
-                  <a:srgbClr val="1F2D33"/>
-                </a:solidFill>
-                <a:latin typeface="Arial"/>
-                <a:ea typeface="Hiragino Sans"/>
-                <a:cs typeface="Hiragino Sans"/>
-              </a:rPr>
-              <a:t/>
-            </a:r>
+            <a:endParaRPr/>
           </a:p>
           <a:p>
             <a:pPr algn="l">
@@ -13136,7 +13112,9 @@
         <p:txBody>
           <a:bodyPr rtlCol="0" anchor="ctr"/>
           <a:lstStyle/>
-          <a:p/>
+          <a:p>
+            <a:endParaRPr/>
+          </a:p>
         </p:txBody>
       </p:sp>
       <p:sp>
@@ -13178,7 +13156,9 @@
         <p:txBody>
           <a:bodyPr rtlCol="0" anchor="ctr"/>
           <a:lstStyle/>
-          <a:p/>
+          <a:p>
+            <a:endParaRPr/>
+          </a:p>
         </p:txBody>
       </p:sp>
       <p:sp>
@@ -13220,7 +13200,9 @@
         <p:txBody>
           <a:bodyPr rtlCol="0" anchor="ctr"/>
           <a:lstStyle/>
-          <a:p/>
+          <a:p>
+            <a:endParaRPr/>
+          </a:p>
         </p:txBody>
       </p:sp>
       <p:sp>
@@ -13262,7 +13244,9 @@
         <p:txBody>
           <a:bodyPr rtlCol="0" anchor="ctr"/>
           <a:lstStyle/>
-          <a:p/>
+          <a:p>
+            <a:endParaRPr/>
+          </a:p>
         </p:txBody>
       </p:sp>
       <p:sp>
@@ -13304,7 +13288,9 @@
         <p:txBody>
           <a:bodyPr rtlCol="0" anchor="ctr"/>
           <a:lstStyle/>
-          <a:p/>
+          <a:p>
+            <a:endParaRPr/>
+          </a:p>
         </p:txBody>
       </p:sp>
       <p:sp>
@@ -13346,7 +13332,9 @@
         <p:txBody>
           <a:bodyPr rtlCol="0" anchor="ctr"/>
           <a:lstStyle/>
-          <a:p/>
+          <a:p>
+            <a:endParaRPr/>
+          </a:p>
         </p:txBody>
       </p:sp>
       <p:sp>
@@ -13390,7 +13378,9 @@
         <p:txBody>
           <a:bodyPr rtlCol="0" anchor="ctr"/>
           <a:lstStyle/>
-          <a:p/>
+          <a:p>
+            <a:endParaRPr/>
+          </a:p>
         </p:txBody>
       </p:sp>
       <p:sp>
@@ -13410,7 +13400,7 @@
           <a:noFill/>
         </p:spPr>
         <p:txBody>
-          <a:bodyPr wrap="square" anchor="t" lIns="0" rIns="0" tIns="0" bIns="0">
+          <a:bodyPr wrap="square" lIns="0" tIns="0" rIns="0" bIns="0" anchor="t">
             <a:spAutoFit/>
           </a:bodyPr>
           <a:lstStyle/>
@@ -13447,7 +13437,7 @@
           <a:noFill/>
         </p:spPr>
         <p:txBody>
-          <a:bodyPr wrap="square" anchor="t" lIns="0" rIns="0" tIns="0" bIns="0">
+          <a:bodyPr wrap="square" lIns="0" tIns="0" rIns="0" bIns="0" anchor="t">
             <a:spAutoFit/>
           </a:bodyPr>
           <a:lstStyle/>
@@ -13550,7 +13540,9 @@
         <p:txBody>
           <a:bodyPr rtlCol="0" anchor="ctr"/>
           <a:lstStyle/>
-          <a:p/>
+          <a:p>
+            <a:endParaRPr/>
+          </a:p>
         </p:txBody>
       </p:sp>
       <p:sp>
@@ -13594,7 +13586,9 @@
         <p:txBody>
           <a:bodyPr rtlCol="0" anchor="ctr"/>
           <a:lstStyle/>
-          <a:p/>
+          <a:p>
+            <a:endParaRPr/>
+          </a:p>
         </p:txBody>
       </p:sp>
       <p:sp>
@@ -13614,7 +13608,7 @@
           <a:noFill/>
         </p:spPr>
         <p:txBody>
-          <a:bodyPr wrap="square" anchor="t" lIns="0" rIns="0" tIns="0" bIns="0">
+          <a:bodyPr wrap="square" lIns="0" tIns="0" rIns="0" bIns="0" anchor="t">
             <a:spAutoFit/>
           </a:bodyPr>
           <a:lstStyle/>
@@ -13651,7 +13645,7 @@
           <a:noFill/>
         </p:spPr>
         <p:txBody>
-          <a:bodyPr wrap="square" anchor="t" lIns="0" rIns="0" tIns="0" bIns="0">
+          <a:bodyPr wrap="square" lIns="0" tIns="0" rIns="0" bIns="0" anchor="t">
             <a:spAutoFit/>
           </a:bodyPr>
           <a:lstStyle/>
@@ -13754,7 +13748,9 @@
         <p:txBody>
           <a:bodyPr rtlCol="0" anchor="ctr"/>
           <a:lstStyle/>
-          <a:p/>
+          <a:p>
+            <a:endParaRPr/>
+          </a:p>
         </p:txBody>
       </p:sp>
       <p:sp>
@@ -13798,7 +13794,9 @@
         <p:txBody>
           <a:bodyPr rtlCol="0" anchor="ctr"/>
           <a:lstStyle/>
-          <a:p/>
+          <a:p>
+            <a:endParaRPr/>
+          </a:p>
         </p:txBody>
       </p:sp>
       <p:sp>
@@ -13818,7 +13816,7 @@
           <a:noFill/>
         </p:spPr>
         <p:txBody>
-          <a:bodyPr wrap="square" anchor="t" lIns="0" rIns="0" tIns="0" bIns="0">
+          <a:bodyPr wrap="square" lIns="0" tIns="0" rIns="0" bIns="0" anchor="t">
             <a:spAutoFit/>
           </a:bodyPr>
           <a:lstStyle/>
@@ -13855,7 +13853,7 @@
           <a:noFill/>
         </p:spPr>
         <p:txBody>
-          <a:bodyPr wrap="square" anchor="t" lIns="0" rIns="0" tIns="0" bIns="0">
+          <a:bodyPr wrap="square" lIns="0" tIns="0" rIns="0" bIns="0" anchor="t">
             <a:spAutoFit/>
           </a:bodyPr>
           <a:lstStyle/>
@@ -13958,7 +13956,9 @@
         <p:txBody>
           <a:bodyPr rtlCol="0" anchor="ctr"/>
           <a:lstStyle/>
-          <a:p/>
+          <a:p>
+            <a:endParaRPr/>
+          </a:p>
         </p:txBody>
       </p:sp>
       <p:sp>
@@ -14002,7 +14002,9 @@
         <p:txBody>
           <a:bodyPr rtlCol="0" anchor="ctr"/>
           <a:lstStyle/>
-          <a:p/>
+          <a:p>
+            <a:endParaRPr/>
+          </a:p>
         </p:txBody>
       </p:sp>
       <p:sp>
@@ -14022,7 +14024,7 @@
           <a:noFill/>
         </p:spPr>
         <p:txBody>
-          <a:bodyPr wrap="square" anchor="t" lIns="0" rIns="0" tIns="0" bIns="0">
+          <a:bodyPr wrap="square" lIns="0" tIns="0" rIns="0" bIns="0" anchor="t">
             <a:spAutoFit/>
           </a:bodyPr>
           <a:lstStyle/>
@@ -14059,7 +14061,7 @@
           <a:noFill/>
         </p:spPr>
         <p:txBody>
-          <a:bodyPr wrap="square" anchor="t" lIns="0" rIns="0" tIns="0" bIns="0">
+          <a:bodyPr wrap="square" lIns="0" tIns="0" rIns="0" bIns="0" anchor="t">
             <a:spAutoFit/>
           </a:bodyPr>
           <a:lstStyle/>
@@ -14162,7 +14164,9 @@
         <p:txBody>
           <a:bodyPr rtlCol="0" anchor="ctr"/>
           <a:lstStyle/>
-          <a:p/>
+          <a:p>
+            <a:endParaRPr/>
+          </a:p>
         </p:txBody>
       </p:sp>
     </p:spTree>
@@ -14174,7 +14178,7 @@
 </file>
 
 <file path=ppt/slides/slide6.xml><?xml version="1.0" encoding="utf-8"?>
-<p:sld xmlns:a="http://schemas.openxmlformats.org/drawingml/2006/main" xmlns:p="http://schemas.openxmlformats.org/presentationml/2006/main" xmlns:r="http://schemas.openxmlformats.org/officeDocument/2006/relationships">
+<p:sld xmlns:a="http://schemas.openxmlformats.org/drawingml/2006/main" xmlns:r="http://schemas.openxmlformats.org/officeDocument/2006/relationships" xmlns:p="http://schemas.openxmlformats.org/presentationml/2006/main">
   <p:cSld>
     <p:bg>
       <p:bgPr>
@@ -14190,7 +14194,14 @@
         <p:cNvGrpSpPr/>
         <p:nvPr/>
       </p:nvGrpSpPr>
-      <p:grpSpPr/>
+      <p:grpSpPr>
+        <a:xfrm>
+          <a:off x="0" y="0"/>
+          <a:ext cx="0" cy="0"/>
+          <a:chOff x="0" y="0"/>
+          <a:chExt cx="0" cy="0"/>
+        </a:xfrm>
+      </p:grpSpPr>
       <p:sp>
         <p:nvSpPr>
           <p:cNvPr id="2" name="TextBox 1"/>
@@ -14208,7 +14219,7 @@
           <a:noFill/>
         </p:spPr>
         <p:txBody>
-          <a:bodyPr wrap="square" anchor="t" lIns="0" rIns="0" tIns="0" bIns="0">
+          <a:bodyPr wrap="square" lIns="0" tIns="0" rIns="0" bIns="0" anchor="t">
             <a:spAutoFit/>
           </a:bodyPr>
           <a:lstStyle/>
@@ -14245,7 +14256,7 @@
           <a:noFill/>
         </p:spPr>
         <p:txBody>
-          <a:bodyPr wrap="square" anchor="t" lIns="0" rIns="0" tIns="0" bIns="0">
+          <a:bodyPr wrap="square" lIns="0" tIns="0" rIns="0" bIns="0" anchor="t">
             <a:spAutoFit/>
           </a:bodyPr>
           <a:lstStyle/>
@@ -14282,7 +14293,7 @@
           <a:noFill/>
         </p:spPr>
         <p:txBody>
-          <a:bodyPr wrap="square" anchor="t" lIns="0" rIns="0" tIns="0" bIns="0">
+          <a:bodyPr wrap="square" lIns="0" tIns="0" rIns="0" bIns="0" anchor="t">
             <a:spAutoFit/>
           </a:bodyPr>
           <a:lstStyle/>
@@ -14343,7 +14354,9 @@
         <p:txBody>
           <a:bodyPr rtlCol="0" anchor="ctr"/>
           <a:lstStyle/>
-          <a:p/>
+          <a:p>
+            <a:endParaRPr/>
+          </a:p>
         </p:txBody>
       </p:sp>
       <p:sp>
@@ -14387,7 +14400,9 @@
         <p:txBody>
           <a:bodyPr rtlCol="0" anchor="ctr"/>
           <a:lstStyle/>
-          <a:p/>
+          <a:p>
+            <a:endParaRPr/>
+          </a:p>
         </p:txBody>
       </p:sp>
       <p:sp>
@@ -14407,7 +14422,7 @@
           <a:noFill/>
         </p:spPr>
         <p:txBody>
-          <a:bodyPr wrap="square" anchor="t" lIns="0" rIns="0" tIns="0" bIns="0">
+          <a:bodyPr wrap="square" lIns="0" tIns="0" rIns="0" bIns="0" anchor="t">
             <a:spAutoFit/>
           </a:bodyPr>
           <a:lstStyle/>
@@ -14466,7 +14481,7 @@
           </a:fontRef>
         </p:style>
         <p:txBody>
-          <a:bodyPr rtlCol="0" anchor="ctr" wrap="square" lIns="45720" rIns="45720"/>
+          <a:bodyPr wrap="square" lIns="45720" rIns="45720" rtlCol="0" anchor="ctr"/>
           <a:lstStyle/>
           <a:p>
             <a:pPr algn="ctr"/>
@@ -14501,7 +14516,7 @@
           <a:noFill/>
         </p:spPr>
         <p:txBody>
-          <a:bodyPr wrap="square" anchor="ctr" lIns="0" rIns="0" tIns="0" bIns="0">
+          <a:bodyPr wrap="square" lIns="0" tIns="0" rIns="0" bIns="0" anchor="ctr">
             <a:spAutoFit/>
           </a:bodyPr>
           <a:lstStyle/>
@@ -14560,7 +14575,7 @@
           </a:fontRef>
         </p:style>
         <p:txBody>
-          <a:bodyPr rtlCol="0" anchor="ctr" wrap="square" lIns="45720" rIns="45720"/>
+          <a:bodyPr wrap="square" lIns="45720" rIns="45720" rtlCol="0" anchor="ctr"/>
           <a:lstStyle/>
           <a:p>
             <a:pPr algn="ctr"/>
@@ -14595,7 +14610,7 @@
           <a:noFill/>
         </p:spPr>
         <p:txBody>
-          <a:bodyPr wrap="square" anchor="ctr" lIns="0" rIns="0" tIns="0" bIns="0">
+          <a:bodyPr wrap="square" lIns="0" tIns="0" rIns="0" bIns="0" anchor="ctr">
             <a:spAutoFit/>
           </a:bodyPr>
           <a:lstStyle/>
@@ -14654,7 +14669,7 @@
           </a:fontRef>
         </p:style>
         <p:txBody>
-          <a:bodyPr rtlCol="0" anchor="ctr" wrap="square" lIns="45720" rIns="45720"/>
+          <a:bodyPr wrap="square" lIns="45720" rIns="45720" rtlCol="0" anchor="ctr"/>
           <a:lstStyle/>
           <a:p>
             <a:pPr algn="ctr"/>
@@ -14689,7 +14704,7 @@
           <a:noFill/>
         </p:spPr>
         <p:txBody>
-          <a:bodyPr wrap="square" anchor="ctr" lIns="0" rIns="0" tIns="0" bIns="0">
+          <a:bodyPr wrap="square" lIns="0" tIns="0" rIns="0" bIns="0" anchor="ctr">
             <a:spAutoFit/>
           </a:bodyPr>
           <a:lstStyle/>
@@ -14748,7 +14763,7 @@
           </a:fontRef>
         </p:style>
         <p:txBody>
-          <a:bodyPr rtlCol="0" anchor="ctr" wrap="square" lIns="45720" rIns="45720"/>
+          <a:bodyPr wrap="square" lIns="45720" rIns="45720" rtlCol="0" anchor="ctr"/>
           <a:lstStyle/>
           <a:p>
             <a:pPr algn="ctr"/>
@@ -14783,7 +14798,7 @@
           <a:noFill/>
         </p:spPr>
         <p:txBody>
-          <a:bodyPr wrap="square" anchor="ctr" lIns="0" rIns="0" tIns="0" bIns="0">
+          <a:bodyPr wrap="square" lIns="0" tIns="0" rIns="0" bIns="0" anchor="ctr">
             <a:spAutoFit/>
           </a:bodyPr>
           <a:lstStyle/>
@@ -14842,7 +14857,7 @@
           </a:fontRef>
         </p:style>
         <p:txBody>
-          <a:bodyPr rtlCol="0" anchor="ctr" wrap="square" lIns="45720" rIns="45720"/>
+          <a:bodyPr wrap="square" lIns="45720" rIns="45720" rtlCol="0" anchor="ctr"/>
           <a:lstStyle/>
           <a:p>
             <a:pPr algn="ctr"/>
@@ -14877,7 +14892,7 @@
           <a:noFill/>
         </p:spPr>
         <p:txBody>
-          <a:bodyPr wrap="square" anchor="ctr" lIns="0" rIns="0" tIns="0" bIns="0">
+          <a:bodyPr wrap="square" lIns="0" tIns="0" rIns="0" bIns="0" anchor="ctr">
             <a:spAutoFit/>
           </a:bodyPr>
           <a:lstStyle/>
@@ -14936,7 +14951,7 @@
           </a:fontRef>
         </p:style>
         <p:txBody>
-          <a:bodyPr rtlCol="0" anchor="ctr" wrap="square" lIns="45720" rIns="45720"/>
+          <a:bodyPr wrap="square" lIns="45720" rIns="45720" rtlCol="0" anchor="ctr"/>
           <a:lstStyle/>
           <a:p>
             <a:pPr algn="ctr"/>
@@ -14971,7 +14986,7 @@
           <a:noFill/>
         </p:spPr>
         <p:txBody>
-          <a:bodyPr wrap="square" anchor="t" lIns="0" rIns="0" tIns="0" bIns="0">
+          <a:bodyPr wrap="square" lIns="0" tIns="0" rIns="0" bIns="0" anchor="t">
             <a:spAutoFit/>
           </a:bodyPr>
           <a:lstStyle/>
@@ -15032,7 +15047,9 @@
         <p:txBody>
           <a:bodyPr rtlCol="0" anchor="ctr"/>
           <a:lstStyle/>
-          <a:p/>
+          <a:p>
+            <a:endParaRPr/>
+          </a:p>
         </p:txBody>
       </p:sp>
       <p:sp>
@@ -15072,7 +15089,7 @@
           </a:fontRef>
         </p:style>
         <p:txBody>
-          <a:bodyPr rtlCol="0" anchor="ctr" wrap="square" lIns="45720" rIns="45720"/>
+          <a:bodyPr wrap="square" lIns="45720" rIns="45720" rtlCol="0" anchor="ctr"/>
           <a:lstStyle/>
           <a:p>
             <a:pPr algn="ctr"/>
@@ -15107,7 +15124,7 @@
           <a:noFill/>
         </p:spPr>
         <p:txBody>
-          <a:bodyPr wrap="square" anchor="t" lIns="0" rIns="0" tIns="0" bIns="0">
+          <a:bodyPr wrap="square" lIns="0" tIns="0" rIns="0" bIns="0" anchor="t">
             <a:spAutoFit/>
           </a:bodyPr>
           <a:lstStyle/>
@@ -15144,7 +15161,7 @@
           <a:noFill/>
         </p:spPr>
         <p:txBody>
-          <a:bodyPr wrap="square" anchor="t" lIns="0" rIns="0" tIns="0" bIns="0">
+          <a:bodyPr wrap="square" lIns="0" tIns="0" rIns="0" bIns="0" anchor="t">
             <a:spAutoFit/>
           </a:bodyPr>
           <a:lstStyle/>
@@ -15205,7 +15222,9 @@
         <p:txBody>
           <a:bodyPr rtlCol="0" anchor="ctr"/>
           <a:lstStyle/>
-          <a:p/>
+          <a:p>
+            <a:endParaRPr/>
+          </a:p>
         </p:txBody>
       </p:sp>
       <p:sp>
@@ -15245,7 +15264,7 @@
           </a:fontRef>
         </p:style>
         <p:txBody>
-          <a:bodyPr rtlCol="0" anchor="ctr" wrap="square" lIns="45720" rIns="45720"/>
+          <a:bodyPr wrap="square" lIns="45720" rIns="45720" rtlCol="0" anchor="ctr"/>
           <a:lstStyle/>
           <a:p>
             <a:pPr algn="ctr"/>
@@ -15280,7 +15299,7 @@
           <a:noFill/>
         </p:spPr>
         <p:txBody>
-          <a:bodyPr wrap="square" anchor="t" lIns="0" rIns="0" tIns="0" bIns="0">
+          <a:bodyPr wrap="square" lIns="0" tIns="0" rIns="0" bIns="0" anchor="t">
             <a:spAutoFit/>
           </a:bodyPr>
           <a:lstStyle/>
@@ -15317,7 +15336,7 @@
           <a:noFill/>
         </p:spPr>
         <p:txBody>
-          <a:bodyPr wrap="square" anchor="t" lIns="0" rIns="0" tIns="0" bIns="0">
+          <a:bodyPr wrap="square" lIns="0" tIns="0" rIns="0" bIns="0" anchor="t">
             <a:spAutoFit/>
           </a:bodyPr>
           <a:lstStyle/>
@@ -15378,7 +15397,9 @@
         <p:txBody>
           <a:bodyPr rtlCol="0" anchor="ctr"/>
           <a:lstStyle/>
-          <a:p/>
+          <a:p>
+            <a:endParaRPr/>
+          </a:p>
         </p:txBody>
       </p:sp>
       <p:sp>
@@ -15418,7 +15439,7 @@
           </a:fontRef>
         </p:style>
         <p:txBody>
-          <a:bodyPr rtlCol="0" anchor="ctr" wrap="square" lIns="45720" rIns="45720"/>
+          <a:bodyPr wrap="square" lIns="45720" rIns="45720" rtlCol="0" anchor="ctr"/>
           <a:lstStyle/>
           <a:p>
             <a:pPr algn="ctr"/>
@@ -15453,7 +15474,7 @@
           <a:noFill/>
         </p:spPr>
         <p:txBody>
-          <a:bodyPr wrap="square" anchor="t" lIns="0" rIns="0" tIns="0" bIns="0">
+          <a:bodyPr wrap="square" lIns="0" tIns="0" rIns="0" bIns="0" anchor="t">
             <a:spAutoFit/>
           </a:bodyPr>
           <a:lstStyle/>
@@ -15490,7 +15511,7 @@
           <a:noFill/>
         </p:spPr>
         <p:txBody>
-          <a:bodyPr wrap="square" anchor="t" lIns="0" rIns="0" tIns="0" bIns="0">
+          <a:bodyPr wrap="square" lIns="0" tIns="0" rIns="0" bIns="0" anchor="t">
             <a:spAutoFit/>
           </a:bodyPr>
           <a:lstStyle/>
@@ -15551,7 +15572,9 @@
         <p:txBody>
           <a:bodyPr rtlCol="0" anchor="ctr"/>
           <a:lstStyle/>
-          <a:p/>
+          <a:p>
+            <a:endParaRPr/>
+          </a:p>
         </p:txBody>
       </p:sp>
       <p:sp>
@@ -15591,7 +15614,7 @@
           </a:fontRef>
         </p:style>
         <p:txBody>
-          <a:bodyPr rtlCol="0" anchor="ctr" wrap="square" lIns="45720" rIns="45720"/>
+          <a:bodyPr wrap="square" lIns="45720" rIns="45720" rtlCol="0" anchor="ctr"/>
           <a:lstStyle/>
           <a:p>
             <a:pPr algn="ctr"/>
@@ -15626,7 +15649,7 @@
           <a:noFill/>
         </p:spPr>
         <p:txBody>
-          <a:bodyPr wrap="square" anchor="t" lIns="0" rIns="0" tIns="0" bIns="0">
+          <a:bodyPr wrap="square" lIns="0" tIns="0" rIns="0" bIns="0" anchor="t">
             <a:spAutoFit/>
           </a:bodyPr>
           <a:lstStyle/>
@@ -15663,7 +15686,7 @@
           <a:noFill/>
         </p:spPr>
         <p:txBody>
-          <a:bodyPr wrap="square" anchor="t" lIns="0" rIns="0" tIns="0" bIns="0">
+          <a:bodyPr wrap="square" lIns="0" tIns="0" rIns="0" bIns="0" anchor="t">
             <a:spAutoFit/>
           </a:bodyPr>
           <a:lstStyle/>
@@ -15692,7 +15715,7 @@
 </file>
 
 <file path=ppt/slides/slide7.xml><?xml version="1.0" encoding="utf-8"?>
-<p:sld xmlns:a="http://schemas.openxmlformats.org/drawingml/2006/main" xmlns:p="http://schemas.openxmlformats.org/presentationml/2006/main" xmlns:r="http://schemas.openxmlformats.org/officeDocument/2006/relationships">
+<p:sld xmlns:a="http://schemas.openxmlformats.org/drawingml/2006/main" xmlns:r="http://schemas.openxmlformats.org/officeDocument/2006/relationships" xmlns:p="http://schemas.openxmlformats.org/presentationml/2006/main">
   <p:cSld>
     <p:bg>
       <p:bgPr>
@@ -15708,7 +15731,14 @@
         <p:cNvGrpSpPr/>
         <p:nvPr/>
       </p:nvGrpSpPr>
-      <p:grpSpPr/>
+      <p:grpSpPr>
+        <a:xfrm>
+          <a:off x="0" y="0"/>
+          <a:ext cx="0" cy="0"/>
+          <a:chOff x="0" y="0"/>
+          <a:chExt cx="0" cy="0"/>
+        </a:xfrm>
+      </p:grpSpPr>
       <p:sp>
         <p:nvSpPr>
           <p:cNvPr id="2" name="TextBox 1"/>
@@ -15726,7 +15756,7 @@
           <a:noFill/>
         </p:spPr>
         <p:txBody>
-          <a:bodyPr wrap="square" anchor="t" lIns="0" rIns="0" tIns="0" bIns="0">
+          <a:bodyPr wrap="square" lIns="0" tIns="0" rIns="0" bIns="0" anchor="t">
             <a:spAutoFit/>
           </a:bodyPr>
           <a:lstStyle/>
@@ -15763,7 +15793,7 @@
           <a:noFill/>
         </p:spPr>
         <p:txBody>
-          <a:bodyPr wrap="square" anchor="t" lIns="0" rIns="0" tIns="0" bIns="0">
+          <a:bodyPr wrap="square" lIns="0" tIns="0" rIns="0" bIns="0" anchor="t">
             <a:spAutoFit/>
           </a:bodyPr>
           <a:lstStyle/>
@@ -15800,7 +15830,7 @@
           <a:noFill/>
         </p:spPr>
         <p:txBody>
-          <a:bodyPr wrap="square" anchor="t" lIns="0" rIns="0" tIns="0" bIns="0">
+          <a:bodyPr wrap="square" lIns="0" tIns="0" rIns="0" bIns="0" anchor="t">
             <a:spAutoFit/>
           </a:bodyPr>
           <a:lstStyle/>
@@ -15861,7 +15891,9 @@
         <p:txBody>
           <a:bodyPr rtlCol="0" anchor="ctr"/>
           <a:lstStyle/>
-          <a:p/>
+          <a:p>
+            <a:endParaRPr/>
+          </a:p>
         </p:txBody>
       </p:sp>
       <p:sp>
@@ -15881,7 +15913,7 @@
           <a:noFill/>
         </p:spPr>
         <p:txBody>
-          <a:bodyPr wrap="square" anchor="t" lIns="0" rIns="0" tIns="0" bIns="0">
+          <a:bodyPr wrap="square" lIns="0" tIns="0" rIns="0" bIns="0" anchor="t">
             <a:spAutoFit/>
           </a:bodyPr>
           <a:lstStyle/>
@@ -15918,7 +15950,7 @@
           <a:noFill/>
         </p:spPr>
         <p:txBody>
-          <a:bodyPr wrap="square" anchor="t" lIns="0" rIns="0" tIns="0" bIns="0">
+          <a:bodyPr wrap="square" lIns="0" tIns="0" rIns="0" bIns="0" anchor="t">
             <a:spAutoFit/>
           </a:bodyPr>
           <a:lstStyle/>
@@ -15955,12 +15987,12 @@
           <a:noFill/>
         </p:spPr>
         <p:txBody>
-          <a:bodyPr wrap="square" anchor="t" lIns="0" rIns="0" tIns="0" bIns="0">
+          <a:bodyPr wrap="square" lIns="0" tIns="0" rIns="0" bIns="0" anchor="t">
             <a:spAutoFit/>
           </a:bodyPr>
           <a:lstStyle/>
           <a:p>
-            <a:pPr algn="l" marL="228600" indent="-228600">
+            <a:pPr marL="228600" indent="-228600" algn="l">
               <a:spcAft>
                 <a:spcPts val="600"/>
               </a:spcAft>
@@ -15979,7 +16011,7 @@
             </a:r>
           </a:p>
           <a:p>
-            <a:pPr algn="l" marL="228600" indent="-228600">
+            <a:pPr marL="228600" indent="-228600" algn="l">
               <a:spcAft>
                 <a:spcPts val="600"/>
               </a:spcAft>
@@ -15998,7 +16030,7 @@
             </a:r>
           </a:p>
           <a:p>
-            <a:pPr algn="l" marL="228600" indent="-228600">
+            <a:pPr marL="228600" indent="-228600" algn="l">
               <a:spcAft>
                 <a:spcPts val="600"/>
               </a:spcAft>
@@ -16017,7 +16049,7 @@
             </a:r>
           </a:p>
           <a:p>
-            <a:pPr algn="l" marL="228600" indent="-228600">
+            <a:pPr marL="228600" indent="-228600" algn="l">
               <a:spcAft>
                 <a:spcPts val="600"/>
               </a:spcAft>
@@ -16036,7 +16068,7 @@
             </a:r>
           </a:p>
           <a:p>
-            <a:pPr algn="l" marL="228600" indent="-228600">
+            <a:pPr marL="228600" indent="-228600" algn="l">
               <a:spcAft>
                 <a:spcPts val="600"/>
               </a:spcAft>
@@ -16097,7 +16129,9 @@
         <p:txBody>
           <a:bodyPr rtlCol="0" anchor="ctr"/>
           <a:lstStyle/>
-          <a:p/>
+          <a:p>
+            <a:endParaRPr/>
+          </a:p>
         </p:txBody>
       </p:sp>
       <p:sp>
@@ -16117,7 +16151,7 @@
           <a:noFill/>
         </p:spPr>
         <p:txBody>
-          <a:bodyPr wrap="square" anchor="t" lIns="0" rIns="0" tIns="0" bIns="0">
+          <a:bodyPr wrap="square" lIns="0" tIns="0" rIns="0" bIns="0" anchor="t">
             <a:spAutoFit/>
           </a:bodyPr>
           <a:lstStyle/>
@@ -16154,7 +16188,7 @@
           <a:noFill/>
         </p:spPr>
         <p:txBody>
-          <a:bodyPr wrap="square" anchor="t" lIns="0" rIns="0" tIns="0" bIns="0">
+          <a:bodyPr wrap="square" lIns="0" tIns="0" rIns="0" bIns="0" anchor="t">
             <a:spAutoFit/>
           </a:bodyPr>
           <a:lstStyle/>
@@ -16191,12 +16225,12 @@
           <a:noFill/>
         </p:spPr>
         <p:txBody>
-          <a:bodyPr wrap="square" anchor="t" lIns="0" rIns="0" tIns="0" bIns="0">
+          <a:bodyPr wrap="square" lIns="0" tIns="0" rIns="0" bIns="0" anchor="t">
             <a:spAutoFit/>
           </a:bodyPr>
           <a:lstStyle/>
           <a:p>
-            <a:pPr algn="l" marL="228600" indent="-228600">
+            <a:pPr marL="228600" indent="-228600" algn="l">
               <a:spcAft>
                 <a:spcPts val="600"/>
               </a:spcAft>
@@ -16215,7 +16249,7 @@
             </a:r>
           </a:p>
           <a:p>
-            <a:pPr algn="l" marL="228600" indent="-228600">
+            <a:pPr marL="228600" indent="-228600" algn="l">
               <a:spcAft>
                 <a:spcPts val="600"/>
               </a:spcAft>
@@ -16234,7 +16268,7 @@
             </a:r>
           </a:p>
           <a:p>
-            <a:pPr algn="l" marL="228600" indent="-228600">
+            <a:pPr marL="228600" indent="-228600" algn="l">
               <a:spcAft>
                 <a:spcPts val="600"/>
               </a:spcAft>
@@ -16253,7 +16287,7 @@
             </a:r>
           </a:p>
           <a:p>
-            <a:pPr algn="l" marL="228600" indent="-228600">
+            <a:pPr marL="228600" indent="-228600" algn="l">
               <a:spcAft>
                 <a:spcPts val="600"/>
               </a:spcAft>
@@ -16272,7 +16306,7 @@
             </a:r>
           </a:p>
           <a:p>
-            <a:pPr algn="l" marL="228600" indent="-228600">
+            <a:pPr marL="228600" indent="-228600" algn="l">
               <a:spcAft>
                 <a:spcPts val="600"/>
               </a:spcAft>
@@ -16333,7 +16367,9 @@
         <p:txBody>
           <a:bodyPr rtlCol="0" anchor="ctr"/>
           <a:lstStyle/>
-          <a:p/>
+          <a:p>
+            <a:endParaRPr/>
+          </a:p>
         </p:txBody>
       </p:sp>
       <p:sp>
@@ -16353,7 +16389,7 @@
           <a:noFill/>
         </p:spPr>
         <p:txBody>
-          <a:bodyPr wrap="square" anchor="t" lIns="0" rIns="0" tIns="0" bIns="0">
+          <a:bodyPr wrap="square" lIns="0" tIns="0" rIns="0" bIns="0" anchor="t">
             <a:spAutoFit/>
           </a:bodyPr>
           <a:lstStyle/>
@@ -16390,7 +16426,7 @@
           <a:noFill/>
         </p:spPr>
         <p:txBody>
-          <a:bodyPr wrap="square" anchor="t" lIns="0" rIns="0" tIns="0" bIns="0">
+          <a:bodyPr wrap="square" lIns="0" tIns="0" rIns="0" bIns="0" anchor="t">
             <a:spAutoFit/>
           </a:bodyPr>
           <a:lstStyle/>
@@ -16427,12 +16463,12 @@
           <a:noFill/>
         </p:spPr>
         <p:txBody>
-          <a:bodyPr wrap="square" anchor="t" lIns="0" rIns="0" tIns="0" bIns="0">
+          <a:bodyPr wrap="square" lIns="0" tIns="0" rIns="0" bIns="0" anchor="t">
             <a:spAutoFit/>
           </a:bodyPr>
           <a:lstStyle/>
           <a:p>
-            <a:pPr algn="l" marL="228600" indent="-228600">
+            <a:pPr marL="228600" indent="-228600" algn="l">
               <a:spcAft>
                 <a:spcPts val="600"/>
               </a:spcAft>
@@ -16451,7 +16487,7 @@
             </a:r>
           </a:p>
           <a:p>
-            <a:pPr algn="l" marL="228600" indent="-228600">
+            <a:pPr marL="228600" indent="-228600" algn="l">
               <a:spcAft>
                 <a:spcPts val="600"/>
               </a:spcAft>
@@ -16470,7 +16506,7 @@
             </a:r>
           </a:p>
           <a:p>
-            <a:pPr algn="l" marL="228600" indent="-228600">
+            <a:pPr marL="228600" indent="-228600" algn="l">
               <a:spcAft>
                 <a:spcPts val="600"/>
               </a:spcAft>
@@ -16639,7 +16675,9 @@
         <p:txBody>
           <a:bodyPr rtlCol="0" anchor="ctr"/>
           <a:lstStyle/>
-          <a:p/>
+          <a:p>
+            <a:endParaRPr/>
+          </a:p>
         </p:txBody>
       </p:sp>
       <p:sp>
@@ -16681,7 +16719,9 @@
         <p:txBody>
           <a:bodyPr rtlCol="0" anchor="ctr"/>
           <a:lstStyle/>
-          <a:p/>
+          <a:p>
+            <a:endParaRPr/>
+          </a:p>
         </p:txBody>
       </p:sp>
       <p:sp>
@@ -16701,7 +16741,7 @@
           <a:noFill/>
         </p:spPr>
         <p:txBody>
-          <a:bodyPr wrap="square" anchor="ctr" lIns="0" rIns="0" tIns="0" bIns="0">
+          <a:bodyPr wrap="square" lIns="0" tIns="0" rIns="0" bIns="0" anchor="ctr">
             <a:spAutoFit/>
           </a:bodyPr>
           <a:lstStyle/>
@@ -16771,7 +16811,9 @@
         <p:txBody>
           <a:bodyPr rtlCol="0" anchor="ctr"/>
           <a:lstStyle/>
-          <a:p/>
+          <a:p>
+            <a:endParaRPr/>
+          </a:p>
         </p:txBody>
       </p:sp>
       <p:sp>
@@ -16791,7 +16833,7 @@
           <a:noFill/>
         </p:spPr>
         <p:txBody>
-          <a:bodyPr wrap="square" anchor="ctr" lIns="0" rIns="0" tIns="0" bIns="0">
+          <a:bodyPr wrap="square" lIns="0" tIns="0" rIns="0" bIns="0" anchor="ctr">
             <a:spAutoFit/>
           </a:bodyPr>
           <a:lstStyle/>
@@ -16831,7 +16873,7 @@
 </file>
 
 <file path=ppt/slides/slide8.xml><?xml version="1.0" encoding="utf-8"?>
-<p:sld xmlns:a="http://schemas.openxmlformats.org/drawingml/2006/main" xmlns:p="http://schemas.openxmlformats.org/presentationml/2006/main" xmlns:r="http://schemas.openxmlformats.org/officeDocument/2006/relationships">
+<p:sld xmlns:a="http://schemas.openxmlformats.org/drawingml/2006/main" xmlns:r="http://schemas.openxmlformats.org/officeDocument/2006/relationships" xmlns:p="http://schemas.openxmlformats.org/presentationml/2006/main">
   <p:cSld>
     <p:bg>
       <p:bgPr>
@@ -16847,7 +16889,14 @@
         <p:cNvGrpSpPr/>
         <p:nvPr/>
       </p:nvGrpSpPr>
-      <p:grpSpPr/>
+      <p:grpSpPr>
+        <a:xfrm>
+          <a:off x="0" y="0"/>
+          <a:ext cx="0" cy="0"/>
+          <a:chOff x="0" y="0"/>
+          <a:chExt cx="0" cy="0"/>
+        </a:xfrm>
+      </p:grpSpPr>
       <p:sp>
         <p:nvSpPr>
           <p:cNvPr id="2" name="TextBox 1"/>
@@ -16865,7 +16914,7 @@
           <a:noFill/>
         </p:spPr>
         <p:txBody>
-          <a:bodyPr wrap="square" anchor="t" lIns="0" rIns="0" tIns="0" bIns="0">
+          <a:bodyPr wrap="square" lIns="0" tIns="0" rIns="0" bIns="0" anchor="t">
             <a:spAutoFit/>
           </a:bodyPr>
           <a:lstStyle/>
@@ -16902,7 +16951,7 @@
           <a:noFill/>
         </p:spPr>
         <p:txBody>
-          <a:bodyPr wrap="square" anchor="t" lIns="0" rIns="0" tIns="0" bIns="0">
+          <a:bodyPr wrap="square" lIns="0" tIns="0" rIns="0" bIns="0" anchor="t">
             <a:spAutoFit/>
           </a:bodyPr>
           <a:lstStyle/>
@@ -16939,7 +16988,7 @@
           <a:noFill/>
         </p:spPr>
         <p:txBody>
-          <a:bodyPr wrap="square" anchor="t" lIns="0" rIns="0" tIns="0" bIns="0">
+          <a:bodyPr wrap="square" lIns="0" tIns="0" rIns="0" bIns="0" anchor="t">
             <a:spAutoFit/>
           </a:bodyPr>
           <a:lstStyle/>
@@ -17000,7 +17049,9 @@
         <p:txBody>
           <a:bodyPr rtlCol="0" anchor="ctr"/>
           <a:lstStyle/>
-          <a:p/>
+          <a:p>
+            <a:endParaRPr/>
+          </a:p>
         </p:txBody>
       </p:sp>
       <p:sp>
@@ -17020,7 +17071,7 @@
           <a:noFill/>
         </p:spPr>
         <p:txBody>
-          <a:bodyPr wrap="square" anchor="t" lIns="0" rIns="0" tIns="0" bIns="0">
+          <a:bodyPr wrap="square" lIns="0" tIns="0" rIns="0" bIns="0" anchor="t">
             <a:spAutoFit/>
           </a:bodyPr>
           <a:lstStyle/>
@@ -17081,7 +17132,9 @@
         <p:txBody>
           <a:bodyPr rtlCol="0" anchor="ctr"/>
           <a:lstStyle/>
-          <a:p/>
+          <a:p>
+            <a:endParaRPr/>
+          </a:p>
         </p:txBody>
       </p:sp>
       <p:sp>
@@ -17101,7 +17154,7 @@
           <a:noFill/>
         </p:spPr>
         <p:txBody>
-          <a:bodyPr wrap="square" anchor="t" lIns="0" rIns="0" tIns="0" bIns="0">
+          <a:bodyPr wrap="square" lIns="0" tIns="0" rIns="0" bIns="0" anchor="t">
             <a:spAutoFit/>
           </a:bodyPr>
           <a:lstStyle/>
@@ -17138,12 +17191,12 @@
           <a:noFill/>
         </p:spPr>
         <p:txBody>
-          <a:bodyPr wrap="square" anchor="t" lIns="0" rIns="0" tIns="0" bIns="0">
+          <a:bodyPr wrap="square" lIns="0" tIns="0" rIns="0" bIns="0" anchor="t">
             <a:spAutoFit/>
           </a:bodyPr>
           <a:lstStyle/>
           <a:p>
-            <a:pPr algn="l" marL="228600" indent="-228600">
+            <a:pPr marL="228600" indent="-228600" algn="l">
               <a:spcAft>
                 <a:spcPts val="200"/>
               </a:spcAft>
@@ -17162,7 +17215,7 @@
             </a:r>
           </a:p>
           <a:p>
-            <a:pPr algn="l" marL="228600" indent="-228600">
+            <a:pPr marL="228600" indent="-228600" algn="l">
               <a:spcAft>
                 <a:spcPts val="200"/>
               </a:spcAft>
@@ -17181,7 +17234,7 @@
             </a:r>
           </a:p>
           <a:p>
-            <a:pPr algn="l" marL="228600" indent="-228600">
+            <a:pPr marL="228600" indent="-228600" algn="l">
               <a:spcAft>
                 <a:spcPts val="200"/>
               </a:spcAft>
@@ -17200,7 +17253,7 @@
             </a:r>
           </a:p>
           <a:p>
-            <a:pPr algn="l" marL="228600" indent="-228600">
+            <a:pPr marL="228600" indent="-228600" algn="l">
               <a:spcAft>
                 <a:spcPts val="200"/>
               </a:spcAft>
@@ -17261,7 +17314,9 @@
         <p:txBody>
           <a:bodyPr rtlCol="0" anchor="ctr"/>
           <a:lstStyle/>
-          <a:p/>
+          <a:p>
+            <a:endParaRPr/>
+          </a:p>
         </p:txBody>
       </p:sp>
       <p:sp>
@@ -17281,7 +17336,7 @@
           <a:noFill/>
         </p:spPr>
         <p:txBody>
-          <a:bodyPr wrap="square" anchor="t" lIns="0" rIns="0" tIns="0" bIns="0">
+          <a:bodyPr wrap="square" lIns="0" tIns="0" rIns="0" bIns="0" anchor="t">
             <a:spAutoFit/>
           </a:bodyPr>
           <a:lstStyle/>
@@ -17318,12 +17373,12 @@
           <a:noFill/>
         </p:spPr>
         <p:txBody>
-          <a:bodyPr wrap="square" anchor="t" lIns="0" rIns="0" tIns="0" bIns="0">
+          <a:bodyPr wrap="square" lIns="0" tIns="0" rIns="0" bIns="0" anchor="t">
             <a:spAutoFit/>
           </a:bodyPr>
           <a:lstStyle/>
           <a:p>
-            <a:pPr algn="l" marL="228600" indent="-228600">
+            <a:pPr marL="228600" indent="-228600" algn="l">
               <a:spcAft>
                 <a:spcPts val="200"/>
               </a:spcAft>
@@ -17342,7 +17397,7 @@
             </a:r>
           </a:p>
           <a:p>
-            <a:pPr algn="l" marL="228600" indent="-228600">
+            <a:pPr marL="228600" indent="-228600" algn="l">
               <a:spcAft>
                 <a:spcPts val="200"/>
               </a:spcAft>
@@ -17403,7 +17458,9 @@
         <p:txBody>
           <a:bodyPr rtlCol="0" anchor="ctr"/>
           <a:lstStyle/>
-          <a:p/>
+          <a:p>
+            <a:endParaRPr/>
+          </a:p>
         </p:txBody>
       </p:sp>
       <p:sp>
@@ -17423,7 +17480,7 @@
           <a:noFill/>
         </p:spPr>
         <p:txBody>
-          <a:bodyPr wrap="square" anchor="t" lIns="0" rIns="0" tIns="0" bIns="0">
+          <a:bodyPr wrap="square" lIns="0" tIns="0" rIns="0" bIns="0" anchor="t">
             <a:spAutoFit/>
           </a:bodyPr>
           <a:lstStyle/>
@@ -17460,7 +17517,7 @@
           <a:noFill/>
         </p:spPr>
         <p:txBody>
-          <a:bodyPr wrap="square" anchor="t" lIns="0" rIns="0" tIns="0" bIns="0">
+          <a:bodyPr wrap="square" lIns="0" tIns="0" rIns="0" bIns="0" anchor="t">
             <a:spAutoFit/>
           </a:bodyPr>
           <a:lstStyle/>
@@ -17521,7 +17578,9 @@
         <p:txBody>
           <a:bodyPr rtlCol="0" anchor="ctr"/>
           <a:lstStyle/>
-          <a:p/>
+          <a:p>
+            <a:endParaRPr/>
+          </a:p>
         </p:txBody>
       </p:sp>
       <p:sp>
@@ -17541,7 +17600,7 @@
           <a:noFill/>
         </p:spPr>
         <p:txBody>
-          <a:bodyPr wrap="square" anchor="t" lIns="0" rIns="0" tIns="0" bIns="0">
+          <a:bodyPr wrap="square" lIns="0" tIns="0" rIns="0" bIns="0" anchor="t">
             <a:spAutoFit/>
           </a:bodyPr>
           <a:lstStyle/>
@@ -17578,7 +17637,7 @@
           <a:noFill/>
         </p:spPr>
         <p:txBody>
-          <a:bodyPr wrap="square" anchor="t" lIns="0" rIns="0" tIns="0" bIns="0">
+          <a:bodyPr wrap="square" lIns="0" tIns="0" rIns="0" bIns="0" anchor="t">
             <a:spAutoFit/>
           </a:bodyPr>
           <a:lstStyle/>
@@ -17639,7 +17698,9 @@
         <p:txBody>
           <a:bodyPr rtlCol="0" anchor="ctr"/>
           <a:lstStyle/>
-          <a:p/>
+          <a:p>
+            <a:endParaRPr/>
+          </a:p>
         </p:txBody>
       </p:sp>
       <p:sp>
@@ -17659,7 +17720,7 @@
           <a:noFill/>
         </p:spPr>
         <p:txBody>
-          <a:bodyPr wrap="square" anchor="t" lIns="0" rIns="0" tIns="0" bIns="0">
+          <a:bodyPr wrap="square" lIns="0" tIns="0" rIns="0" bIns="0" anchor="t">
             <a:spAutoFit/>
           </a:bodyPr>
           <a:lstStyle/>
@@ -17696,7 +17757,7 @@
           <a:noFill/>
         </p:spPr>
         <p:txBody>
-          <a:bodyPr wrap="square" anchor="t" lIns="0" rIns="0" tIns="0" bIns="0">
+          <a:bodyPr wrap="square" lIns="0" tIns="0" rIns="0" bIns="0" anchor="t">
             <a:spAutoFit/>
           </a:bodyPr>
           <a:lstStyle/>
@@ -17807,7 +17868,6 @@
               <a:srgbClr val="2E9AA8"/>
             </a:solidFill>
             <a:tailEnd type="triangle"/>
-            <a:headEnd type="triangle"/>
           </a:ln>
         </p:spPr>
         <p:style>
@@ -17866,7 +17926,9 @@
         <p:txBody>
           <a:bodyPr rtlCol="0" anchor="ctr"/>
           <a:lstStyle/>
-          <a:p/>
+          <a:p>
+            <a:endParaRPr/>
+          </a:p>
         </p:txBody>
       </p:sp>
       <p:sp>
@@ -17886,7 +17948,7 @@
           <a:noFill/>
         </p:spPr>
         <p:txBody>
-          <a:bodyPr wrap="square" anchor="t" lIns="0" rIns="0" tIns="0" bIns="0">
+          <a:bodyPr wrap="square" lIns="0" tIns="0" rIns="0" bIns="0" anchor="t">
             <a:spAutoFit/>
           </a:bodyPr>
           <a:lstStyle/>
@@ -17927,7 +17989,7 @@
           <a:noFill/>
         </p:spPr>
         <p:txBody>
-          <a:bodyPr wrap="square" anchor="t" lIns="0" rIns="0" tIns="0" bIns="0">
+          <a:bodyPr wrap="square" lIns="0" tIns="0" rIns="0" bIns="0" anchor="t">
             <a:spAutoFit/>
           </a:bodyPr>
           <a:lstStyle/>
@@ -17988,7 +18050,9 @@
         <p:txBody>
           <a:bodyPr rtlCol="0" anchor="ctr"/>
           <a:lstStyle/>
-          <a:p/>
+          <a:p>
+            <a:endParaRPr/>
+          </a:p>
         </p:txBody>
       </p:sp>
       <p:sp>
@@ -18008,7 +18072,7 @@
           <a:noFill/>
         </p:spPr>
         <p:txBody>
-          <a:bodyPr wrap="square" anchor="t" lIns="0" rIns="0" tIns="0" bIns="0">
+          <a:bodyPr wrap="square" lIns="0" tIns="0" rIns="0" bIns="0" anchor="t">
             <a:spAutoFit/>
           </a:bodyPr>
           <a:lstStyle/>
@@ -18050,7 +18114,7 @@
           <a:noFill/>
         </p:spPr>
         <p:txBody>
-          <a:bodyPr wrap="square" anchor="t" lIns="0" rIns="0" tIns="0" bIns="0">
+          <a:bodyPr wrap="square" lIns="0" tIns="0" rIns="0" bIns="0" anchor="t">
             <a:spAutoFit/>
           </a:bodyPr>
           <a:lstStyle/>
@@ -18159,7 +18223,7 @@
           <a:noFill/>
         </p:spPr>
         <p:txBody>
-          <a:bodyPr wrap="square" anchor="t" lIns="0" rIns="0" tIns="0" bIns="0">
+          <a:bodyPr wrap="square" lIns="0" tIns="0" rIns="0" bIns="0" anchor="t">
             <a:spAutoFit/>
           </a:bodyPr>
           <a:lstStyle/>
@@ -18192,7 +18256,7 @@
 </file>
 
 <file path=ppt/slides/slide9.xml><?xml version="1.0" encoding="utf-8"?>
-<p:sld xmlns:a="http://schemas.openxmlformats.org/drawingml/2006/main" xmlns:p="http://schemas.openxmlformats.org/presentationml/2006/main" xmlns:r="http://schemas.openxmlformats.org/officeDocument/2006/relationships">
+<p:sld xmlns:a="http://schemas.openxmlformats.org/drawingml/2006/main" xmlns:r="http://schemas.openxmlformats.org/officeDocument/2006/relationships" xmlns:p="http://schemas.openxmlformats.org/presentationml/2006/main">
   <p:cSld>
     <p:bg>
       <p:bgPr>
@@ -18208,7 +18272,14 @@
         <p:cNvGrpSpPr/>
         <p:nvPr/>
       </p:nvGrpSpPr>
-      <p:grpSpPr/>
+      <p:grpSpPr>
+        <a:xfrm>
+          <a:off x="0" y="0"/>
+          <a:ext cx="0" cy="0"/>
+          <a:chOff x="0" y="0"/>
+          <a:chExt cx="0" cy="0"/>
+        </a:xfrm>
+      </p:grpSpPr>
       <p:sp>
         <p:nvSpPr>
           <p:cNvPr id="2" name="TextBox 1"/>
@@ -18226,7 +18297,7 @@
           <a:noFill/>
         </p:spPr>
         <p:txBody>
-          <a:bodyPr wrap="square" anchor="t" lIns="0" rIns="0" tIns="0" bIns="0">
+          <a:bodyPr wrap="square" lIns="0" tIns="0" rIns="0" bIns="0" anchor="t">
             <a:spAutoFit/>
           </a:bodyPr>
           <a:lstStyle/>
@@ -18263,7 +18334,7 @@
           <a:noFill/>
         </p:spPr>
         <p:txBody>
-          <a:bodyPr wrap="square" anchor="t" lIns="0" rIns="0" tIns="0" bIns="0">
+          <a:bodyPr wrap="square" lIns="0" tIns="0" rIns="0" bIns="0" anchor="t">
             <a:spAutoFit/>
           </a:bodyPr>
           <a:lstStyle/>
@@ -18300,7 +18371,7 @@
           <a:noFill/>
         </p:spPr>
         <p:txBody>
-          <a:bodyPr wrap="square" anchor="t" lIns="0" rIns="0" tIns="0" bIns="0">
+          <a:bodyPr wrap="square" lIns="0" tIns="0" rIns="0" bIns="0" anchor="t">
             <a:spAutoFit/>
           </a:bodyPr>
           <a:lstStyle/>
@@ -18339,10 +18410,34 @@
                 <a:tableStyleId>{5C22544A-7EE6-4342-B048-85BDC9FD1C3A}</a:tableStyleId>
               </a:tblPr>
               <a:tblGrid>
-                <a:gridCol w="1005840"/>
-                <a:gridCol w="2194560"/>
-                <a:gridCol w="2834640"/>
-                <a:gridCol w="5029200"/>
+                <a:gridCol w="1005840">
+                  <a:extLst>
+                    <a:ext uri="{9D8B030D-6E8A-4147-A177-3AD203B41FA5}">
+                      <a16:colId xmlns:a16="http://schemas.microsoft.com/office/drawing/2014/main" val="20000"/>
+                    </a:ext>
+                  </a:extLst>
+                </a:gridCol>
+                <a:gridCol w="2194560">
+                  <a:extLst>
+                    <a:ext uri="{9D8B030D-6E8A-4147-A177-3AD203B41FA5}">
+                      <a16:colId xmlns:a16="http://schemas.microsoft.com/office/drawing/2014/main" val="20001"/>
+                    </a:ext>
+                  </a:extLst>
+                </a:gridCol>
+                <a:gridCol w="2834640">
+                  <a:extLst>
+                    <a:ext uri="{9D8B030D-6E8A-4147-A177-3AD203B41FA5}">
+                      <a16:colId xmlns:a16="http://schemas.microsoft.com/office/drawing/2014/main" val="20002"/>
+                    </a:ext>
+                  </a:extLst>
+                </a:gridCol>
+                <a:gridCol w="5029200">
+                  <a:extLst>
+                    <a:ext uri="{9D8B030D-6E8A-4147-A177-3AD203B41FA5}">
+                      <a16:colId xmlns:a16="http://schemas.microsoft.com/office/drawing/2014/main" val="20003"/>
+                    </a:ext>
+                  </a:extLst>
+                </a:gridCol>
               </a:tblGrid>
               <a:tr h="548640">
                 <a:tc>
@@ -18441,6 +18536,11 @@
                     </a:solidFill>
                   </a:tcPr>
                 </a:tc>
+                <a:extLst>
+                  <a:ext uri="{0D108BD9-81ED-4DB2-BD59-A6C34878D82A}">
+                    <a16:rowId xmlns:a16="http://schemas.microsoft.com/office/drawing/2014/main" val="10000"/>
+                  </a:ext>
+                </a:extLst>
               </a:tr>
               <a:tr h="548640">
                 <a:tc>
@@ -18539,6 +18639,11 @@
                     </a:solidFill>
                   </a:tcPr>
                 </a:tc>
+                <a:extLst>
+                  <a:ext uri="{0D108BD9-81ED-4DB2-BD59-A6C34878D82A}">
+                    <a16:rowId xmlns:a16="http://schemas.microsoft.com/office/drawing/2014/main" val="10001"/>
+                  </a:ext>
+                </a:extLst>
               </a:tr>
               <a:tr h="548640">
                 <a:tc>
@@ -18637,6 +18742,11 @@
                     </a:solidFill>
                   </a:tcPr>
                 </a:tc>
+                <a:extLst>
+                  <a:ext uri="{0D108BD9-81ED-4DB2-BD59-A6C34878D82A}">
+                    <a16:rowId xmlns:a16="http://schemas.microsoft.com/office/drawing/2014/main" val="10002"/>
+                  </a:ext>
+                </a:extLst>
               </a:tr>
               <a:tr h="548640">
                 <a:tc>
@@ -18735,6 +18845,11 @@
                     </a:solidFill>
                   </a:tcPr>
                 </a:tc>
+                <a:extLst>
+                  <a:ext uri="{0D108BD9-81ED-4DB2-BD59-A6C34878D82A}">
+                    <a16:rowId xmlns:a16="http://schemas.microsoft.com/office/drawing/2014/main" val="10003"/>
+                  </a:ext>
+                </a:extLst>
               </a:tr>
               <a:tr h="548640">
                 <a:tc>
@@ -18833,6 +18948,11 @@
                     </a:solidFill>
                   </a:tcPr>
                 </a:tc>
+                <a:extLst>
+                  <a:ext uri="{0D108BD9-81ED-4DB2-BD59-A6C34878D82A}">
+                    <a16:rowId xmlns:a16="http://schemas.microsoft.com/office/drawing/2014/main" val="10004"/>
+                  </a:ext>
+                </a:extLst>
               </a:tr>
               <a:tr h="548640">
                 <a:tc>
@@ -18931,6 +19051,11 @@
                     </a:solidFill>
                   </a:tcPr>
                 </a:tc>
+                <a:extLst>
+                  <a:ext uri="{0D108BD9-81ED-4DB2-BD59-A6C34878D82A}">
+                    <a16:rowId xmlns:a16="http://schemas.microsoft.com/office/drawing/2014/main" val="10005"/>
+                  </a:ext>
+                </a:extLst>
               </a:tr>
               <a:tr h="548640">
                 <a:tc>
@@ -19029,6 +19154,11 @@
                     </a:solidFill>
                   </a:tcPr>
                 </a:tc>
+                <a:extLst>
+                  <a:ext uri="{0D108BD9-81ED-4DB2-BD59-A6C34878D82A}">
+                    <a16:rowId xmlns:a16="http://schemas.microsoft.com/office/drawing/2014/main" val="10006"/>
+                  </a:ext>
+                </a:extLst>
               </a:tr>
             </a:tbl>
           </a:graphicData>
@@ -19051,12 +19181,12 @@
           <a:noFill/>
         </p:spPr>
         <p:txBody>
-          <a:bodyPr wrap="square" anchor="t" lIns="0" rIns="0" tIns="0" bIns="0">
+          <a:bodyPr wrap="square" lIns="0" tIns="0" rIns="0" bIns="0" anchor="t">
             <a:spAutoFit/>
           </a:bodyPr>
           <a:lstStyle/>
           <a:p>
-            <a:pPr algn="l" marL="228600" indent="-228600">
+            <a:pPr marL="228600" indent="-228600" algn="l">
               <a:spcAft>
                 <a:spcPts val="300"/>
               </a:spcAft>
@@ -19075,7 +19205,7 @@
             </a:r>
           </a:p>
           <a:p>
-            <a:pPr algn="l" marL="228600" indent="-228600">
+            <a:pPr marL="228600" indent="-228600" algn="l">
               <a:spcAft>
                 <a:spcPts val="300"/>
               </a:spcAft>
@@ -19424,7 +19554,7 @@
 </file>
 
 <file path=ppt/theme/theme2.xml><?xml version="1.0" encoding="utf-8"?>
-<a:theme xmlns:a="http://schemas.openxmlformats.org/drawingml/2006/main" name="Office Theme">
+<a:theme xmlns:a="http://schemas.openxmlformats.org/drawingml/2006/main" name="Office テーマ">
   <a:themeElements>
     <a:clrScheme name="Office">
       <a:dk1>
@@ -19434,44 +19564,44 @@
         <a:sysClr val="window" lastClr="FFFFFF"/>
       </a:lt1>
       <a:dk2>
-        <a:srgbClr val="1F497D"/>
+        <a:srgbClr val="0E2841"/>
       </a:dk2>
       <a:lt2>
-        <a:srgbClr val="EEECE1"/>
+        <a:srgbClr val="E8E8E8"/>
       </a:lt2>
       <a:accent1>
-        <a:srgbClr val="4F81BD"/>
+        <a:srgbClr val="156082"/>
       </a:accent1>
       <a:accent2>
-        <a:srgbClr val="C0504D"/>
+        <a:srgbClr val="E97132"/>
       </a:accent2>
       <a:accent3>
-        <a:srgbClr val="9BBB59"/>
+        <a:srgbClr val="196B24"/>
       </a:accent3>
       <a:accent4>
-        <a:srgbClr val="8064A2"/>
+        <a:srgbClr val="0F9ED5"/>
       </a:accent4>
       <a:accent5>
-        <a:srgbClr val="4BACC6"/>
+        <a:srgbClr val="A02B93"/>
       </a:accent5>
       <a:accent6>
-        <a:srgbClr val="F79646"/>
+        <a:srgbClr val="4EA72E"/>
       </a:accent6>
       <a:hlink>
-        <a:srgbClr val="0000FF"/>
+        <a:srgbClr val="467886"/>
       </a:hlink>
       <a:folHlink>
-        <a:srgbClr val="800080"/>
+        <a:srgbClr val="96607D"/>
       </a:folHlink>
     </a:clrScheme>
     <a:fontScheme name="Office">
       <a:majorFont>
-        <a:latin typeface="Calibri"/>
+        <a:latin typeface="游ゴシック Light" panose="02110004020202020204"/>
         <a:ea typeface=""/>
         <a:cs typeface=""/>
-        <a:font script="Jpan" typeface="ＭＳ Ｐゴシック"/>
+        <a:font script="Jpan" typeface="游ゴシック Light"/>
         <a:font script="Hang" typeface="맑은 고딕"/>
-        <a:font script="Hans" typeface="宋体"/>
+        <a:font script="Hans" typeface="等线 Light"/>
         <a:font script="Hant" typeface="新細明體"/>
         <a:font script="Arab" typeface="Times New Roman"/>
         <a:font script="Hebr" typeface="Times New Roman"/>
@@ -19499,14 +19629,31 @@
         <a:font script="Viet" typeface="Times New Roman"/>
         <a:font script="Uigh" typeface="Microsoft Uighur"/>
         <a:font script="Geor" typeface="Sylfaen"/>
+        <a:font script="Armn" typeface="Arial"/>
+        <a:font script="Bugi" typeface="Leelawadee UI"/>
+        <a:font script="Bopo" typeface="Microsoft JhengHei"/>
+        <a:font script="Java" typeface="Javanese Text"/>
+        <a:font script="Lisu" typeface="Segoe UI"/>
+        <a:font script="Mymr" typeface="Myanmar Text"/>
+        <a:font script="Nkoo" typeface="Ebrima"/>
+        <a:font script="Olck" typeface="Nirmala UI"/>
+        <a:font script="Osma" typeface="Ebrima"/>
+        <a:font script="Phag" typeface="Phagspa"/>
+        <a:font script="Syrn" typeface="Estrangelo Edessa"/>
+        <a:font script="Syrj" typeface="Estrangelo Edessa"/>
+        <a:font script="Syre" typeface="Estrangelo Edessa"/>
+        <a:font script="Sora" typeface="Nirmala UI"/>
+        <a:font script="Tale" typeface="Microsoft Tai Le"/>
+        <a:font script="Talu" typeface="Microsoft New Tai Lue"/>
+        <a:font script="Tfng" typeface="Ebrima"/>
       </a:majorFont>
       <a:minorFont>
-        <a:latin typeface="Calibri"/>
+        <a:latin typeface="游ゴシック" panose="02110004020202020204"/>
         <a:ea typeface=""/>
         <a:cs typeface=""/>
-        <a:font script="Jpan" typeface="ＭＳ Ｐゴシック"/>
+        <a:font script="Jpan" typeface="游ゴシック"/>
         <a:font script="Hang" typeface="맑은 고딕"/>
-        <a:font script="Hans" typeface="宋体"/>
+        <a:font script="Hans" typeface="等线"/>
         <a:font script="Hant" typeface="新細明體"/>
         <a:font script="Arab" typeface="Arial"/>
         <a:font script="Hebr" typeface="Arial"/>
@@ -19534,6 +19681,23 @@
         <a:font script="Viet" typeface="Arial"/>
         <a:font script="Uigh" typeface="Microsoft Uighur"/>
         <a:font script="Geor" typeface="Sylfaen"/>
+        <a:font script="Armn" typeface="Arial"/>
+        <a:font script="Bugi" typeface="Leelawadee UI"/>
+        <a:font script="Bopo" typeface="Microsoft JhengHei"/>
+        <a:font script="Java" typeface="Javanese Text"/>
+        <a:font script="Lisu" typeface="Segoe UI"/>
+        <a:font script="Mymr" typeface="Myanmar Text"/>
+        <a:font script="Nkoo" typeface="Ebrima"/>
+        <a:font script="Olck" typeface="Nirmala UI"/>
+        <a:font script="Osma" typeface="Ebrima"/>
+        <a:font script="Phag" typeface="Phagspa"/>
+        <a:font script="Syrn" typeface="Estrangelo Edessa"/>
+        <a:font script="Syrj" typeface="Estrangelo Edessa"/>
+        <a:font script="Syre" typeface="Estrangelo Edessa"/>
+        <a:font script="Sora" typeface="Nirmala UI"/>
+        <a:font script="Tale" typeface="Microsoft Tai Le"/>
+        <a:font script="Talu" typeface="Microsoft New Tai Lue"/>
+        <a:font script="Tfng" typeface="Ebrima"/>
       </a:minorFont>
     </a:fontScheme>
     <a:fmtScheme name="Office">
@@ -19545,180 +19709,136 @@
           <a:gsLst>
             <a:gs pos="0">
               <a:schemeClr val="phClr">
-                <a:tint val="50000"/>
-                <a:satMod val="300000"/>
+                <a:lumMod val="110000"/>
+                <a:satMod val="105000"/>
+                <a:tint val="67000"/>
               </a:schemeClr>
             </a:gs>
-            <a:gs pos="35000">
+            <a:gs pos="50000">
               <a:schemeClr val="phClr">
-                <a:tint val="37000"/>
-                <a:satMod val="300000"/>
+                <a:lumMod val="105000"/>
+                <a:satMod val="103000"/>
+                <a:tint val="73000"/>
               </a:schemeClr>
             </a:gs>
             <a:gs pos="100000">
               <a:schemeClr val="phClr">
-                <a:tint val="15000"/>
-                <a:satMod val="350000"/>
+                <a:lumMod val="105000"/>
+                <a:satMod val="109000"/>
+                <a:tint val="81000"/>
               </a:schemeClr>
             </a:gs>
           </a:gsLst>
-          <a:lin ang="16200000" scaled="1"/>
+          <a:lin ang="5400000" scaled="0"/>
         </a:gradFill>
         <a:gradFill rotWithShape="1">
           <a:gsLst>
             <a:gs pos="0">
               <a:schemeClr val="phClr">
-                <a:tint val="100000"/>
+                <a:satMod val="103000"/>
+                <a:lumMod val="102000"/>
+                <a:tint val="94000"/>
+              </a:schemeClr>
+            </a:gs>
+            <a:gs pos="50000">
+              <a:schemeClr val="phClr">
+                <a:satMod val="110000"/>
+                <a:lumMod val="100000"/>
                 <a:shade val="100000"/>
-                <a:satMod val="130000"/>
               </a:schemeClr>
             </a:gs>
             <a:gs pos="100000">
               <a:schemeClr val="phClr">
-                <a:tint val="50000"/>
-                <a:shade val="100000"/>
-                <a:satMod val="350000"/>
+                <a:lumMod val="99000"/>
+                <a:satMod val="120000"/>
+                <a:shade val="78000"/>
               </a:schemeClr>
             </a:gs>
           </a:gsLst>
-          <a:lin ang="16200000" scaled="0"/>
+          <a:lin ang="5400000" scaled="0"/>
         </a:gradFill>
       </a:fillStyleLst>
       <a:lnStyleLst>
-        <a:ln w="9525" cap="flat" cmpd="sng" algn="ctr">
+        <a:ln w="12700" cap="flat" cmpd="sng" algn="ctr">
           <a:solidFill>
-            <a:schemeClr val="phClr">
-              <a:shade val="95000"/>
-              <a:satMod val="105000"/>
-            </a:schemeClr>
+            <a:schemeClr val="phClr"/>
           </a:solidFill>
           <a:prstDash val="solid"/>
+          <a:miter lim="800000"/>
+        </a:ln>
+        <a:ln w="19050" cap="flat" cmpd="sng" algn="ctr">
+          <a:solidFill>
+            <a:schemeClr val="phClr"/>
+          </a:solidFill>
+          <a:prstDash val="solid"/>
+          <a:miter lim="800000"/>
         </a:ln>
         <a:ln w="25400" cap="flat" cmpd="sng" algn="ctr">
           <a:solidFill>
             <a:schemeClr val="phClr"/>
           </a:solidFill>
           <a:prstDash val="solid"/>
-        </a:ln>
-        <a:ln w="38100" cap="flat" cmpd="sng" algn="ctr">
-          <a:solidFill>
-            <a:schemeClr val="phClr"/>
-          </a:solidFill>
-          <a:prstDash val="solid"/>
+          <a:miter lim="800000"/>
         </a:ln>
       </a:lnStyleLst>
       <a:effectStyleLst>
         <a:effectStyle>
+          <a:effectLst/>
+        </a:effectStyle>
+        <a:effectStyle>
+          <a:effectLst/>
+        </a:effectStyle>
+        <a:effectStyle>
           <a:effectLst>
-            <a:outerShdw blurRad="40000" dist="20000" dir="5400000" rotWithShape="0">
+            <a:outerShdw blurRad="57150" dist="19050" dir="5400000" algn="ctr" rotWithShape="0">
               <a:srgbClr val="000000">
-                <a:alpha val="38000"/>
+                <a:alpha val="63000"/>
               </a:srgbClr>
             </a:outerShdw>
           </a:effectLst>
-        </a:effectStyle>
-        <a:effectStyle>
-          <a:effectLst>
-            <a:outerShdw blurRad="40000" dist="23000" dir="5400000" rotWithShape="0">
-              <a:srgbClr val="000000">
-                <a:alpha val="35000"/>
-              </a:srgbClr>
-            </a:outerShdw>
-          </a:effectLst>
-        </a:effectStyle>
-        <a:effectStyle>
-          <a:effectLst>
-            <a:outerShdw blurRad="40000" dist="23000" dir="5400000" rotWithShape="0">
-              <a:srgbClr val="000000">
-                <a:alpha val="35000"/>
-              </a:srgbClr>
-            </a:outerShdw>
-          </a:effectLst>
-          <a:scene3d>
-            <a:camera prst="orthographicFront">
-              <a:rot lat="0" lon="0" rev="0"/>
-            </a:camera>
-            <a:lightRig rig="threePt" dir="t">
-              <a:rot lat="0" lon="0" rev="1200000"/>
-            </a:lightRig>
-          </a:scene3d>
-          <a:sp3d>
-            <a:bevelT w="63500" h="25400"/>
-          </a:sp3d>
         </a:effectStyle>
       </a:effectStyleLst>
       <a:bgFillStyleLst>
         <a:solidFill>
           <a:schemeClr val="phClr"/>
         </a:solidFill>
+        <a:solidFill>
+          <a:schemeClr val="phClr">
+            <a:tint val="95000"/>
+            <a:satMod val="170000"/>
+          </a:schemeClr>
+        </a:solidFill>
         <a:gradFill rotWithShape="1">
           <a:gsLst>
             <a:gs pos="0">
               <a:schemeClr val="phClr">
-                <a:tint val="40000"/>
-                <a:satMod val="350000"/>
+                <a:tint val="93000"/>
+                <a:satMod val="150000"/>
+                <a:shade val="98000"/>
+                <a:lumMod val="102000"/>
               </a:schemeClr>
             </a:gs>
-            <a:gs pos="40000">
+            <a:gs pos="50000">
               <a:schemeClr val="phClr">
-                <a:tint val="45000"/>
-                <a:shade val="99000"/>
-                <a:satMod val="350000"/>
+                <a:tint val="98000"/>
+                <a:satMod val="130000"/>
+                <a:shade val="90000"/>
+                <a:lumMod val="103000"/>
               </a:schemeClr>
             </a:gs>
             <a:gs pos="100000">
               <a:schemeClr val="phClr">
-                <a:shade val="20000"/>
-                <a:satMod val="255000"/>
+                <a:shade val="63000"/>
+                <a:satMod val="120000"/>
               </a:schemeClr>
             </a:gs>
           </a:gsLst>
-          <a:path path="circle">
-            <a:fillToRect l="50000" t="-80000" r="50000" b="180000"/>
-          </a:path>
-        </a:gradFill>
-        <a:gradFill rotWithShape="1">
-          <a:gsLst>
-            <a:gs pos="0">
-              <a:schemeClr val="phClr">
-                <a:tint val="80000"/>
-                <a:satMod val="300000"/>
-              </a:schemeClr>
-            </a:gs>
-            <a:gs pos="100000">
-              <a:schemeClr val="phClr">
-                <a:shade val="30000"/>
-                <a:satMod val="200000"/>
-              </a:schemeClr>
-            </a:gs>
-          </a:gsLst>
-          <a:path path="circle">
-            <a:fillToRect l="50000" t="50000" r="50000" b="50000"/>
-          </a:path>
+          <a:lin ang="5400000" scaled="0"/>
         </a:gradFill>
       </a:bgFillStyleLst>
     </a:fmtScheme>
   </a:themeElements>
   <a:objectDefaults>
-    <a:spDef>
-      <a:spPr/>
-      <a:bodyPr/>
-      <a:lstStyle/>
-      <a:style>
-        <a:lnRef idx="1">
-          <a:schemeClr val="accent1"/>
-        </a:lnRef>
-        <a:fillRef idx="3">
-          <a:schemeClr val="accent1"/>
-        </a:fillRef>
-        <a:effectRef idx="2">
-          <a:schemeClr val="accent1"/>
-        </a:effectRef>
-        <a:fontRef idx="minor">
-          <a:schemeClr val="lt1"/>
-        </a:fontRef>
-      </a:style>
-    </a:spDef>
     <a:lnDef>
       <a:spPr/>
       <a:bodyPr/>
@@ -19740,5 +19860,10 @@
     </a:lnDef>
   </a:objectDefaults>
   <a:extraClrSchemeLst/>
+  <a:extLst>
+    <a:ext uri="{05A4C25C-085E-4340-85A3-A5531E510DB2}">
+      <thm15:themeFamily xmlns:thm15="http://schemas.microsoft.com/office/thememl/2012/main" name="Office Theme" id="{2E142A2C-CD16-42D6-873A-C26D2A0506FA}" vid="{1BDDFF52-6CD6-40A5-AB3C-68EB2F1E4D0A}"/>
+    </a:ext>
+  </a:extLst>
 </a:theme>
 </file>